--- a/mkt1107/output/MKT1107_W02_slides.pptx
+++ b/mkt1107/output/MKT1107_W02_slides.pptx
@@ -162,7 +162,7 @@
   <p:extLst>
     <p:ext uri="{521415D9-36F7-43E2-AB2F-B90AF26B5E84}">
       <p14:sectionLst xmlns:p14="http://schemas.microsoft.com/office/powerpoint/2010/main">
-        <p14:section name="Mở đầu" id="{313e4eff-8fe1-0102-a266-a75a1e4359fb}">
+        <p14:section name="Mở đầu" id="{04643a8e-324e-869b-e8f8-ade9377d3828}">
           <p14:sldIdLst>
             <p14:sldId id="256"/>
             <p14:sldId id="257"/>
@@ -170,7 +170,7 @@
             <p14:sldId id="259"/>
           </p14:sldIdLst>
         </p14:section>
-        <p14:section name="S2 · Vì sao trích dẫn; trích dẫn trong bài và trong danh mục" id="{4e8d0672-3e55-80fb-1356-b87a4c624800}">
+        <p14:section name="S2 · Vì sao trích dẫn; trích dẫn trong bài và trong danh mục" id="{83db8264-8620-cff7-5468-95227cd46e56}">
           <p14:sldIdLst>
             <p14:sldId id="260"/>
             <p14:sldId id="261"/>
@@ -180,7 +180,7 @@
             <p14:sldId id="265"/>
           </p14:sldIdLst>
         </p14:section>
-        <p14:section name="S3 · Tìm tài liệu học thuật" id="{01ef7f17-6322-15de-56c4-fbfb911b76ad}">
+        <p14:section name="S3 · Tìm tài liệu học thuật" id="{e53f9da9-4784-b010-611f-1ad3a3b0c050}">
           <p14:sldIdLst>
             <p14:sldId id="266"/>
             <p14:sldId id="267"/>
@@ -193,7 +193,7 @@
             <p14:sldId id="274"/>
           </p14:sldIdLst>
         </p14:section>
-        <p14:section name="S4 · Kiểm tra nhanh: chuỗi tìm kiếm nào tốt hơn?" id="{8591b8bd-7009-329f-60d3-af0719ff10aa}">
+        <p14:section name="S4 · Kiểm tra nhanh: chuỗi tìm kiếm nào tốt hơn?" id="{63cf61df-0e71-34b4-92b3-80caa09fe73a}">
           <p14:sldIdLst>
             <p14:sldId id="275"/>
             <p14:sldId id="276"/>
@@ -202,7 +202,7 @@
             <p14:sldId id="279"/>
           </p14:sldIdLst>
         </p14:section>
-        <p14:section name="S5 · Đánh giá độ tin cậy của nguồn" id="{bf1aef09-8249-8390-ae74-3f316ee8e0b9}">
+        <p14:section name="S5 · Đánh giá độ tin cậy của nguồn" id="{5f0a2c42-8a31-e6e3-9a48-f2b32cd3a7c4}">
           <p14:sldIdLst>
             <p14:sldId id="280"/>
             <p14:sldId id="281"/>
@@ -219,7 +219,7 @@
             <p14:sldId id="292"/>
           </p14:sldIdLst>
         </p14:section>
-        <p14:section name="S7 · Đạo văn và cách tránh" id="{d5c09417-9c74-0452-463e-0668478f3417}">
+        <p14:section name="S7 · Đạo văn và cách tránh" id="{345dee13-4d5a-4fb5-46c7-3e21fbf19645}">
           <p14:sldIdLst>
             <p14:sldId id="293"/>
             <p14:sldId id="294"/>
@@ -230,7 +230,7 @@
             <p14:sldId id="299"/>
           </p14:sldIdLst>
         </p14:section>
-        <p14:section name="S8 · Tóm tắt và tổng hợp tài liệu" id="{527f180e-1b7c-9315-74ac-92f9d0282b6e}">
+        <p14:section name="S8 · Tóm tắt và tổng hợp tài liệu" id="{1ae5540c-51d9-c21d-075e-d0409d84cbbf}">
           <p14:sldIdLst>
             <p14:sldId id="300"/>
             <p14:sldId id="301"/>
@@ -238,14 +238,14 @@
             <p14:sldId id="303"/>
           </p14:sldIdLst>
         </p14:section>
-        <p14:section name="S9 · Thực hành nhóm" id="{ea17774d-0555-81fe-c543-ea406bd078f6}">
+        <p14:section name="S9 · Thực hành nhóm" id="{94f5a6af-98d3-f4a4-5582-d70659f33d0f}">
           <p14:sldIdLst>
             <p14:sldId id="304"/>
             <p14:sldId id="305"/>
             <p14:sldId id="306"/>
           </p14:sldIdLst>
         </p14:section>
-        <p14:section name="S10 · Kết buổi" id="{f308e294-b959-a3b1-7571-dbe6d7fc1209}">
+        <p14:section name="S10 · Kết buổi" id="{95bec49b-5dcd-b2d4-2486-de7131f283eb}">
           <p14:sldIdLst>
             <p14:sldId id="307"/>
             <p14:sldId id="308"/>
@@ -8747,9 +8747,9 @@
             <a:tbl>
               <a:tblPr/>
               <a:tblGrid>
-                <a:gridCol w="3688080"/>
-                <a:gridCol w="3688080"/>
-                <a:gridCol w="3688080"/>
+                <a:gridCol w="3073157"/>
+                <a:gridCol w="4302059"/>
+                <a:gridCol w="3689024"/>
               </a:tblGrid>
               <a:tr h="524256">
                 <a:tc>
@@ -10769,9 +10769,9 @@
             <a:tbl>
               <a:tblPr/>
               <a:tblGrid>
-                <a:gridCol w="3688080"/>
-                <a:gridCol w="3688080"/>
-                <a:gridCol w="3688080"/>
+                <a:gridCol w="2926483"/>
+                <a:gridCol w="2926483"/>
+                <a:gridCol w="5211274"/>
               </a:tblGrid>
               <a:tr h="524256">
                 <a:tc>
@@ -11418,7 +11418,7 @@
                   </a:tcPr>
                 </a:tc>
               </a:tr>
-              <a:tr h="920496">
+              <a:tr h="524256">
                 <a:tc>
                   <a:txBody>
                     <a:bodyPr/>
@@ -11645,7 +11645,7 @@
         </p:nvSpPr>
         <p:spPr>
           <a:xfrm>
-            <a:off x="548640" y="4642104"/>
+            <a:off x="548640" y="4383024"/>
             <a:ext cx="11064240" cy="685800"/>
           </a:xfrm>
           <a:prstGeom prst="roundRect">
@@ -11667,7 +11667,7 @@
         </p:nvSpPr>
         <p:spPr>
           <a:xfrm>
-            <a:off x="731520" y="4756404"/>
+            <a:off x="731520" y="4497324"/>
             <a:ext cx="457200" cy="457200"/>
           </a:xfrm>
           <a:prstGeom prst="ellipse">
@@ -11687,7 +11687,7 @@
         </p:nvSpPr>
         <p:spPr>
           <a:xfrm>
-            <a:off x="731520" y="4756404"/>
+            <a:off x="731520" y="4497324"/>
             <a:ext cx="457200" cy="457200"/>
           </a:xfrm>
           <a:prstGeom prst="rect">
@@ -11726,7 +11726,7 @@
         </p:nvSpPr>
         <p:spPr>
           <a:xfrm>
-            <a:off x="1325880" y="4642104"/>
+            <a:off x="1325880" y="4383024"/>
             <a:ext cx="10149840" cy="685800"/>
           </a:xfrm>
           <a:prstGeom prst="rect">
@@ -11957,9 +11957,9 @@
             <a:tbl>
               <a:tblPr/>
               <a:tblGrid>
-                <a:gridCol w="3688080"/>
-                <a:gridCol w="3688080"/>
-                <a:gridCol w="3688080"/>
+                <a:gridCol w="2863949"/>
+                <a:gridCol w="2863949"/>
+                <a:gridCol w="5336342"/>
               </a:tblGrid>
               <a:tr h="524256">
                 <a:tc>
@@ -12391,7 +12391,7 @@
                   </a:tcPr>
                 </a:tc>
               </a:tr>
-              <a:tr h="920496">
+              <a:tr h="524256">
                 <a:tc>
                   <a:txBody>
                     <a:bodyPr/>
@@ -12821,7 +12821,7 @@
                   </a:tcPr>
                 </a:tc>
               </a:tr>
-              <a:tr h="920496">
+              <a:tr h="524256">
                 <a:tc>
                   <a:txBody>
                     <a:bodyPr/>
@@ -19345,7 +19345,7 @@
         <p:spPr>
           <a:xfrm>
             <a:off x="5943600" y="3566160"/>
-            <a:ext cx="5303520" cy="1463040"/>
+            <a:ext cx="4297680" cy="2011680"/>
           </a:xfrm>
           <a:prstGeom prst="rect">
             <a:avLst/>
@@ -20168,9 +20168,9 @@
             <a:tbl>
               <a:tblPr/>
               <a:tblGrid>
-                <a:gridCol w="3688080"/>
-                <a:gridCol w="3688080"/>
-                <a:gridCol w="3688080"/>
+                <a:gridCol w="4239934"/>
+                <a:gridCol w="3739288"/>
+                <a:gridCol w="3085017"/>
               </a:tblGrid>
               <a:tr h="524256">
                 <a:tc>
@@ -20602,7 +20602,7 @@
                   </a:tcPr>
                 </a:tc>
               </a:tr>
-              <a:tr h="920496">
+              <a:tr h="524256">
                 <a:tc>
                   <a:txBody>
                     <a:bodyPr/>
@@ -26617,9 +26617,9 @@
             <a:tbl>
               <a:tblPr/>
               <a:tblGrid>
-                <a:gridCol w="3688080"/>
-                <a:gridCol w="3688080"/>
-                <a:gridCol w="3688080"/>
+                <a:gridCol w="3695212"/>
+                <a:gridCol w="3221983"/>
+                <a:gridCol w="4147045"/>
               </a:tblGrid>
               <a:tr h="524256">
                 <a:tc>
@@ -35191,11 +35191,11 @@
             <a:tbl>
               <a:tblPr/>
               <a:tblGrid>
-                <a:gridCol w="2212848"/>
-                <a:gridCol w="2212848"/>
-                <a:gridCol w="2212848"/>
-                <a:gridCol w="2212848"/>
-                <a:gridCol w="2212848"/>
+                <a:gridCol w="1473595"/>
+                <a:gridCol w="1473595"/>
+                <a:gridCol w="1997220"/>
+                <a:gridCol w="1915289"/>
+                <a:gridCol w="4204542"/>
               </a:tblGrid>
               <a:tr h="920496">
                 <a:tc>
@@ -35554,7 +35554,7 @@
                   </a:tcPr>
                 </a:tc>
               </a:tr>
-              <a:tr h="1712976">
+              <a:tr h="920496">
                 <a:tc>
                   <a:txBody>
                     <a:bodyPr/>
@@ -35923,7 +35923,7 @@
         </p:nvSpPr>
         <p:spPr>
           <a:xfrm>
-            <a:off x="548640" y="4782312"/>
+            <a:off x="548640" y="4126992"/>
             <a:ext cx="11064240" cy="685800"/>
           </a:xfrm>
           <a:prstGeom prst="roundRect">
@@ -35945,7 +35945,7 @@
         </p:nvSpPr>
         <p:spPr>
           <a:xfrm>
-            <a:off x="731520" y="4896612"/>
+            <a:off x="731520" y="4241292"/>
             <a:ext cx="457200" cy="457200"/>
           </a:xfrm>
           <a:prstGeom prst="ellipse">
@@ -35965,7 +35965,7 @@
         </p:nvSpPr>
         <p:spPr>
           <a:xfrm>
-            <a:off x="731520" y="4896612"/>
+            <a:off x="731520" y="4241292"/>
             <a:ext cx="457200" cy="457200"/>
           </a:xfrm>
           <a:prstGeom prst="rect">
@@ -36004,7 +36004,7 @@
         </p:nvSpPr>
         <p:spPr>
           <a:xfrm>
-            <a:off x="1325880" y="4782312"/>
+            <a:off x="1325880" y="4126992"/>
             <a:ext cx="10149840" cy="685800"/>
           </a:xfrm>
           <a:prstGeom prst="rect">
@@ -39650,7 +39650,7 @@
         </p:nvSpPr>
         <p:spPr>
           <a:xfrm>
-            <a:off x="585216" y="3425952"/>
+            <a:off x="585216" y="3389376"/>
             <a:ext cx="164592" cy="164592"/>
           </a:xfrm>
           <a:prstGeom prst="ellipse">
@@ -39670,7 +39670,7 @@
         </p:nvSpPr>
         <p:spPr>
           <a:xfrm>
-            <a:off x="914400" y="3233928"/>
+            <a:off x="914400" y="3197352"/>
             <a:ext cx="10607040" cy="1341120"/>
           </a:xfrm>
           <a:prstGeom prst="rect">
@@ -39733,6 +39733,102 @@
                 <a:cs typeface="Alexandria" pitchFamily="34" charset="-120"/>
               </a:rPr>
               <a:t>. https://www.ama.org/the-definition-of-marketing-what-is-marketing/</a:t>
+            </a:r>
+            <a:endParaRPr lang="en-US" sz="2400" dirty="0"/>
+          </a:p>
+        </p:txBody>
+      </p:sp>
+      <p:sp>
+        <p:nvSpPr>
+          <p:cNvPr id="10" name="Dấu đầu dòng"/>
+          <p:cNvSpPr/>
+          <p:nvPr/>
+        </p:nvSpPr>
+        <p:spPr>
+          <a:xfrm>
+            <a:off x="585216" y="4803648"/>
+            <a:ext cx="164592" cy="164592"/>
+          </a:xfrm>
+          <a:prstGeom prst="ellipse">
+            <a:avLst/>
+          </a:prstGeom>
+          <a:solidFill>
+            <a:srgbClr val="FF9259"/>
+          </a:solidFill>
+          <a:ln/>
+        </p:spPr>
+      </p:sp>
+      <p:sp>
+        <p:nvSpPr>
+          <p:cNvPr id="11" name="Text 9"/>
+          <p:cNvSpPr txBox="1"/>
+          <p:nvPr/>
+        </p:nvSpPr>
+        <p:spPr>
+          <a:xfrm>
+            <a:off x="914400" y="4611624"/>
+            <a:ext cx="10607040" cy="1341120"/>
+          </a:xfrm>
+          <a:prstGeom prst="rect">
+            <a:avLst/>
+          </a:prstGeom>
+          <a:noFill/>
+          <a:ln/>
+        </p:spPr>
+        <p:txBody>
+          <a:bodyPr wrap="square" lIns="76200" tIns="76200" rIns="76200" bIns="76200" rtlCol="0" anchor="t"/>
+          <a:lstStyle/>
+          <a:p>
+            <a:pPr algn="l" indent="0" marL="0">
+              <a:lnSpc>
+                <a:spcPts val="3100"/>
+              </a:lnSpc>
+              <a:buNone/>
+            </a:pPr>
+            <a:r>
+              <a:rPr lang="en-US" sz="2400" dirty="0">
+                <a:solidFill>
+                  <a:srgbClr val="2E2A3A"/>
+                </a:solidFill>
+                <a:latin typeface="Alexandria" pitchFamily="34" charset="0"/>
+                <a:ea typeface="Alexandria" pitchFamily="34" charset="-122"/>
+                <a:cs typeface="Alexandria" pitchFamily="34" charset="-120"/>
+              </a:rPr>
+              <a:t>American Psychological Association. (2020). </a:t>
+            </a:r>
+            <a:pPr algn="l" indent="0" marL="0">
+              <a:lnSpc>
+                <a:spcPts val="3100"/>
+              </a:lnSpc>
+              <a:buNone/>
+            </a:pPr>
+            <a:r>
+              <a:rPr lang="en-US" sz="2400" i="1" dirty="0">
+                <a:solidFill>
+                  <a:srgbClr val="2E2A3A"/>
+                </a:solidFill>
+                <a:latin typeface="Alexandria" pitchFamily="34" charset="0"/>
+                <a:ea typeface="Alexandria" pitchFamily="34" charset="-122"/>
+                <a:cs typeface="Alexandria" pitchFamily="34" charset="-120"/>
+              </a:rPr>
+              <a:t>Publication manual of the American Psychological Association</a:t>
+            </a:r>
+            <a:pPr algn="l" indent="0" marL="0">
+              <a:lnSpc>
+                <a:spcPts val="3100"/>
+              </a:lnSpc>
+              <a:buNone/>
+            </a:pPr>
+            <a:r>
+              <a:rPr lang="en-US" sz="2400" dirty="0">
+                <a:solidFill>
+                  <a:srgbClr val="2E2A3A"/>
+                </a:solidFill>
+                <a:latin typeface="Alexandria" pitchFamily="34" charset="0"/>
+                <a:ea typeface="Alexandria" pitchFamily="34" charset="-122"/>
+                <a:cs typeface="Alexandria" pitchFamily="34" charset="-120"/>
+              </a:rPr>
+              <a:t> (7th ed.). https://doi.org/10.1037/0000165-000</a:t>
             </a:r>
             <a:endParaRPr lang="en-US" sz="2400" dirty="0"/>
           </a:p>
@@ -39941,102 +40037,6 @@
         <p:spPr>
           <a:xfrm>
             <a:off x="914400" y="1783080"/>
-            <a:ext cx="10607040" cy="1341120"/>
-          </a:xfrm>
-          <a:prstGeom prst="rect">
-            <a:avLst/>
-          </a:prstGeom>
-          <a:noFill/>
-          <a:ln/>
-        </p:spPr>
-        <p:txBody>
-          <a:bodyPr wrap="square" lIns="76200" tIns="76200" rIns="76200" bIns="76200" rtlCol="0" anchor="t"/>
-          <a:lstStyle/>
-          <a:p>
-            <a:pPr algn="l" indent="0" marL="0">
-              <a:lnSpc>
-                <a:spcPts val="3100"/>
-              </a:lnSpc>
-              <a:buNone/>
-            </a:pPr>
-            <a:r>
-              <a:rPr lang="en-US" sz="2400" dirty="0">
-                <a:solidFill>
-                  <a:srgbClr val="2E2A3A"/>
-                </a:solidFill>
-                <a:latin typeface="Alexandria" pitchFamily="34" charset="0"/>
-                <a:ea typeface="Alexandria" pitchFamily="34" charset="-122"/>
-                <a:cs typeface="Alexandria" pitchFamily="34" charset="-120"/>
-              </a:rPr>
-              <a:t>American Psychological Association. (2020). </a:t>
-            </a:r>
-            <a:pPr algn="l" indent="0" marL="0">
-              <a:lnSpc>
-                <a:spcPts val="3100"/>
-              </a:lnSpc>
-              <a:buNone/>
-            </a:pPr>
-            <a:r>
-              <a:rPr lang="en-US" sz="2400" i="1" dirty="0">
-                <a:solidFill>
-                  <a:srgbClr val="2E2A3A"/>
-                </a:solidFill>
-                <a:latin typeface="Alexandria" pitchFamily="34" charset="0"/>
-                <a:ea typeface="Alexandria" pitchFamily="34" charset="-122"/>
-                <a:cs typeface="Alexandria" pitchFamily="34" charset="-120"/>
-              </a:rPr>
-              <a:t>Publication manual of the American Psychological Association</a:t>
-            </a:r>
-            <a:pPr algn="l" indent="0" marL="0">
-              <a:lnSpc>
-                <a:spcPts val="3100"/>
-              </a:lnSpc>
-              <a:buNone/>
-            </a:pPr>
-            <a:r>
-              <a:rPr lang="en-US" sz="2400" dirty="0">
-                <a:solidFill>
-                  <a:srgbClr val="2E2A3A"/>
-                </a:solidFill>
-                <a:latin typeface="Alexandria" pitchFamily="34" charset="0"/>
-                <a:ea typeface="Alexandria" pitchFamily="34" charset="-122"/>
-                <a:cs typeface="Alexandria" pitchFamily="34" charset="-120"/>
-              </a:rPr>
-              <a:t> (7th ed.). https://doi.org/10.1037/0000165-000</a:t>
-            </a:r>
-            <a:endParaRPr lang="en-US" sz="2400" dirty="0"/>
-          </a:p>
-        </p:txBody>
-      </p:sp>
-      <p:sp>
-        <p:nvSpPr>
-          <p:cNvPr id="8" name="Dấu đầu dòng"/>
-          <p:cNvSpPr/>
-          <p:nvPr/>
-        </p:nvSpPr>
-        <p:spPr>
-          <a:xfrm>
-            <a:off x="585216" y="3425952"/>
-            <a:ext cx="164592" cy="164592"/>
-          </a:xfrm>
-          <a:prstGeom prst="ellipse">
-            <a:avLst/>
-          </a:prstGeom>
-          <a:solidFill>
-            <a:srgbClr val="FF9259"/>
-          </a:solidFill>
-          <a:ln/>
-        </p:spPr>
-      </p:sp>
-      <p:sp>
-        <p:nvSpPr>
-          <p:cNvPr id="9" name="Text 7"/>
-          <p:cNvSpPr txBox="1"/>
-          <p:nvPr/>
-        </p:nvSpPr>
-        <p:spPr>
-          <a:xfrm>
-            <a:off x="914400" y="3233928"/>
             <a:ext cx="10607040" cy="944880"/>
           </a:xfrm>
           <a:prstGeom prst="rect">

--- a/mkt1107/output/MKT1107_W02_slides.pptx
+++ b/mkt1107/output/MKT1107_W02_slides.pptx
@@ -162,7 +162,7 @@
   <p:extLst>
     <p:ext uri="{521415D9-36F7-43E2-AB2F-B90AF26B5E84}">
       <p14:sectionLst xmlns:p14="http://schemas.microsoft.com/office/powerpoint/2010/main">
-        <p14:section name="Mở đầu" id="{04643a8e-324e-869b-e8f8-ade9377d3828}">
+        <p14:section name="Mở đầu" id="{1fe1191c-1073-0479-b8d2-071e1f607370}">
           <p14:sldIdLst>
             <p14:sldId id="256"/>
             <p14:sldId id="257"/>
@@ -170,7 +170,7 @@
             <p14:sldId id="259"/>
           </p14:sldIdLst>
         </p14:section>
-        <p14:section name="S2 · Vì sao trích dẫn; trích dẫn trong bài và trong danh mục" id="{83db8264-8620-cff7-5468-95227cd46e56}">
+        <p14:section name="S2 · Vì sao trích dẫn; trích dẫn trong bài và trong danh mục" id="{5eda474d-5742-4f8f-ec1b-c9f507f73d7d}">
           <p14:sldIdLst>
             <p14:sldId id="260"/>
             <p14:sldId id="261"/>
@@ -180,7 +180,7 @@
             <p14:sldId id="265"/>
           </p14:sldIdLst>
         </p14:section>
-        <p14:section name="S3 · Tìm tài liệu học thuật" id="{e53f9da9-4784-b010-611f-1ad3a3b0c050}">
+        <p14:section name="S3 · Tìm tài liệu học thuật" id="{53e8ce92-b618-05a0-9bdc-83b4fbb6a88d}">
           <p14:sldIdLst>
             <p14:sldId id="266"/>
             <p14:sldId id="267"/>
@@ -193,7 +193,7 @@
             <p14:sldId id="274"/>
           </p14:sldIdLst>
         </p14:section>
-        <p14:section name="S4 · Kiểm tra nhanh: chuỗi tìm kiếm nào tốt hơn?" id="{63cf61df-0e71-34b4-92b3-80caa09fe73a}">
+        <p14:section name="S4 · Kiểm tra nhanh: chuỗi tìm kiếm nào tốt hơn?" id="{099830fa-5436-34db-97bf-8a6a6ac039bb}">
           <p14:sldIdLst>
             <p14:sldId id="275"/>
             <p14:sldId id="276"/>
@@ -202,7 +202,7 @@
             <p14:sldId id="279"/>
           </p14:sldIdLst>
         </p14:section>
-        <p14:section name="S5 · Đánh giá độ tin cậy của nguồn" id="{5f0a2c42-8a31-e6e3-9a48-f2b32cd3a7c4}">
+        <p14:section name="S5 · Đánh giá độ tin cậy của nguồn" id="{10a99b38-c2da-e361-4873-a5731b779fdc}">
           <p14:sldIdLst>
             <p14:sldId id="280"/>
             <p14:sldId id="281"/>
@@ -219,7 +219,7 @@
             <p14:sldId id="292"/>
           </p14:sldIdLst>
         </p14:section>
-        <p14:section name="S7 · Đạo văn và cách tránh" id="{345dee13-4d5a-4fb5-46c7-3e21fbf19645}">
+        <p14:section name="S7 · Đạo văn và cách tránh" id="{9de7e3b3-0870-6b63-b447-63e3d4e64bcb}">
           <p14:sldIdLst>
             <p14:sldId id="293"/>
             <p14:sldId id="294"/>
@@ -230,7 +230,7 @@
             <p14:sldId id="299"/>
           </p14:sldIdLst>
         </p14:section>
-        <p14:section name="S8 · Tóm tắt và tổng hợp tài liệu" id="{1ae5540c-51d9-c21d-075e-d0409d84cbbf}">
+        <p14:section name="S8 · Tóm tắt và tổng hợp tài liệu" id="{b13668f5-ffb4-1000-dee2-a838c0fb88c0}">
           <p14:sldIdLst>
             <p14:sldId id="300"/>
             <p14:sldId id="301"/>
@@ -238,14 +238,14 @@
             <p14:sldId id="303"/>
           </p14:sldIdLst>
         </p14:section>
-        <p14:section name="S9 · Thực hành nhóm" id="{94f5a6af-98d3-f4a4-5582-d70659f33d0f}">
+        <p14:section name="S9 · Thực hành nhóm" id="{88543c79-cd45-fdf5-171a-e00839e3a9f6}">
           <p14:sldIdLst>
             <p14:sldId id="304"/>
             <p14:sldId id="305"/>
             <p14:sldId id="306"/>
           </p14:sldIdLst>
         </p14:section>
-        <p14:section name="S10 · Kết buổi" id="{95bec49b-5dcd-b2d4-2486-de7131f283eb}">
+        <p14:section name="S10 · Kết buổi" id="{9414b49a-e2a2-a435-099b-232a4208ab34}">
           <p14:sldIdLst>
             <p14:sldId id="307"/>
             <p14:sldId id="308"/>

--- a/mkt1107/output/MKT1107_W02_slides.pptx
+++ b/mkt1107/output/MKT1107_W02_slides.pptx
@@ -162,7 +162,7 @@
   <p:extLst>
     <p:ext uri="{521415D9-36F7-43E2-AB2F-B90AF26B5E84}">
       <p14:sectionLst xmlns:p14="http://schemas.microsoft.com/office/powerpoint/2010/main">
-        <p14:section name="Mở đầu" id="{1fe1191c-1073-0479-b8d2-071e1f607370}">
+        <p14:section name="Mở đầu" id="{5c9a563a-8e7d-0cb4-6797-6ba58c091b06}">
           <p14:sldIdLst>
             <p14:sldId id="256"/>
             <p14:sldId id="257"/>
@@ -170,7 +170,7 @@
             <p14:sldId id="259"/>
           </p14:sldIdLst>
         </p14:section>
-        <p14:section name="S2 · Vì sao trích dẫn; trích dẫn trong bài và trong danh mục" id="{5eda474d-5742-4f8f-ec1b-c9f507f73d7d}">
+        <p14:section name="S2 · Vì sao trích dẫn; trích dẫn trong bài và trong danh mục" id="{a0a352c7-7b85-3e84-af0a-d0397c840751}">
           <p14:sldIdLst>
             <p14:sldId id="260"/>
             <p14:sldId id="261"/>
@@ -180,7 +180,7 @@
             <p14:sldId id="265"/>
           </p14:sldIdLst>
         </p14:section>
-        <p14:section name="S3 · Tìm tài liệu học thuật" id="{53e8ce92-b618-05a0-9bdc-83b4fbb6a88d}">
+        <p14:section name="S3 · Tìm tài liệu học thuật" id="{721e7ddc-24af-63ea-41e5-ea29afe80612}">
           <p14:sldIdLst>
             <p14:sldId id="266"/>
             <p14:sldId id="267"/>
@@ -193,7 +193,7 @@
             <p14:sldId id="274"/>
           </p14:sldIdLst>
         </p14:section>
-        <p14:section name="S4 · Kiểm tra nhanh: chuỗi tìm kiếm nào tốt hơn?" id="{099830fa-5436-34db-97bf-8a6a6ac039bb}">
+        <p14:section name="S4 · Kiểm tra nhanh: chuỗi tìm kiếm nào tốt hơn?" id="{93f7aa1e-2354-3cc1-44f4-e7cb8b599112}">
           <p14:sldIdLst>
             <p14:sldId id="275"/>
             <p14:sldId id="276"/>
@@ -202,7 +202,7 @@
             <p14:sldId id="279"/>
           </p14:sldIdLst>
         </p14:section>
-        <p14:section name="S5 · Đánh giá độ tin cậy của nguồn" id="{10a99b38-c2da-e361-4873-a5731b779fdc}">
+        <p14:section name="S5 · Đánh giá độ tin cậy của nguồn" id="{834b8b38-4c50-036a-b5e2-d59cf22fe341}">
           <p14:sldIdLst>
             <p14:sldId id="280"/>
             <p14:sldId id="281"/>
@@ -219,7 +219,7 @@
             <p14:sldId id="292"/>
           </p14:sldIdLst>
         </p14:section>
-        <p14:section name="S7 · Đạo văn và cách tránh" id="{9de7e3b3-0870-6b63-b447-63e3d4e64bcb}">
+        <p14:section name="S7 · Đạo văn và cách tránh" id="{043dc9f4-182a-2b55-8f78-4f2a2abdabf2}">
           <p14:sldIdLst>
             <p14:sldId id="293"/>
             <p14:sldId id="294"/>
@@ -230,7 +230,7 @@
             <p14:sldId id="299"/>
           </p14:sldIdLst>
         </p14:section>
-        <p14:section name="S8 · Tóm tắt và tổng hợp tài liệu" id="{b13668f5-ffb4-1000-dee2-a838c0fb88c0}">
+        <p14:section name="S8 · Tóm tắt và tổng hợp tài liệu" id="{3998cb56-b903-e1ec-18df-a110ab715c4b}">
           <p14:sldIdLst>
             <p14:sldId id="300"/>
             <p14:sldId id="301"/>
@@ -238,14 +238,14 @@
             <p14:sldId id="303"/>
           </p14:sldIdLst>
         </p14:section>
-        <p14:section name="S9 · Thực hành nhóm" id="{88543c79-cd45-fdf5-171a-e00839e3a9f6}">
+        <p14:section name="S9 · Thực hành nhóm" id="{245cc48e-74e0-80eb-1361-267f0e419b94}">
           <p14:sldIdLst>
             <p14:sldId id="304"/>
             <p14:sldId id="305"/>
             <p14:sldId id="306"/>
           </p14:sldIdLst>
         </p14:section>
-        <p14:section name="S10 · Kết buổi" id="{9414b49a-e2a2-a435-099b-232a4208ab34}">
+        <p14:section name="S10 · Kết buổi" id="{d6b03280-dd21-adf9-1268-d40eb136c22a}">
           <p14:sldIdLst>
             <p14:sldId id="307"/>
             <p14:sldId id="308"/>

--- a/mkt1107/output/MKT1107_W02_slides.pptx
+++ b/mkt1107/output/MKT1107_W02_slides.pptx
@@ -162,7 +162,7 @@
   <p:extLst>
     <p:ext uri="{521415D9-36F7-43E2-AB2F-B90AF26B5E84}">
       <p14:sectionLst xmlns:p14="http://schemas.microsoft.com/office/powerpoint/2010/main">
-        <p14:section name="Mở đầu" id="{5c9a563a-8e7d-0cb4-6797-6ba58c091b06}">
+        <p14:section name="Mở đầu" id="{e6ffc8bf-0962-e3c4-9ff6-0ab4bfaf20cc}">
           <p14:sldIdLst>
             <p14:sldId id="256"/>
             <p14:sldId id="257"/>
@@ -170,7 +170,7 @@
             <p14:sldId id="259"/>
           </p14:sldIdLst>
         </p14:section>
-        <p14:section name="S2 · Vì sao trích dẫn; trích dẫn trong bài và trong danh mục" id="{a0a352c7-7b85-3e84-af0a-d0397c840751}">
+        <p14:section name="S2 · Vì sao trích dẫn; trích dẫn trong bài và trong danh mục" id="{59d14468-c3a3-d1d2-e35e-ba4dd254daee}">
           <p14:sldIdLst>
             <p14:sldId id="260"/>
             <p14:sldId id="261"/>
@@ -180,7 +180,7 @@
             <p14:sldId id="265"/>
           </p14:sldIdLst>
         </p14:section>
-        <p14:section name="S3 · Tìm tài liệu học thuật" id="{721e7ddc-24af-63ea-41e5-ea29afe80612}">
+        <p14:section name="S3 · Tìm tài liệu học thuật" id="{0c02bdc2-5433-8500-5d98-68558317cf9f}">
           <p14:sldIdLst>
             <p14:sldId id="266"/>
             <p14:sldId id="267"/>
@@ -193,7 +193,7 @@
             <p14:sldId id="274"/>
           </p14:sldIdLst>
         </p14:section>
-        <p14:section name="S4 · Kiểm tra nhanh: chuỗi tìm kiếm nào tốt hơn?" id="{93f7aa1e-2354-3cc1-44f4-e7cb8b599112}">
+        <p14:section name="S4 · Kiểm tra nhanh: chuỗi tìm kiếm nào tốt hơn?" id="{fc8d5b87-247b-492d-475d-a84915345ce5}">
           <p14:sldIdLst>
             <p14:sldId id="275"/>
             <p14:sldId id="276"/>
@@ -202,7 +202,7 @@
             <p14:sldId id="279"/>
           </p14:sldIdLst>
         </p14:section>
-        <p14:section name="S5 · Đánh giá độ tin cậy của nguồn" id="{834b8b38-4c50-036a-b5e2-d59cf22fe341}">
+        <p14:section name="S5 · Đánh giá độ tin cậy của nguồn" id="{503c2b0d-3616-4385-86db-e602a4462cbf}">
           <p14:sldIdLst>
             <p14:sldId id="280"/>
             <p14:sldId id="281"/>
@@ -219,7 +219,7 @@
             <p14:sldId id="292"/>
           </p14:sldIdLst>
         </p14:section>
-        <p14:section name="S7 · Đạo văn và cách tránh" id="{043dc9f4-182a-2b55-8f78-4f2a2abdabf2}">
+        <p14:section name="S7 · Đạo văn và cách tránh" id="{b3407d22-1764-dd05-bd29-bb5d6652a639}">
           <p14:sldIdLst>
             <p14:sldId id="293"/>
             <p14:sldId id="294"/>
@@ -230,7 +230,7 @@
             <p14:sldId id="299"/>
           </p14:sldIdLst>
         </p14:section>
-        <p14:section name="S8 · Tóm tắt và tổng hợp tài liệu" id="{3998cb56-b903-e1ec-18df-a110ab715c4b}">
+        <p14:section name="S8 · Tóm tắt và tổng hợp tài liệu" id="{9534bba6-6a15-1820-6e50-89da5fb6f7e8}">
           <p14:sldIdLst>
             <p14:sldId id="300"/>
             <p14:sldId id="301"/>
@@ -238,14 +238,14 @@
             <p14:sldId id="303"/>
           </p14:sldIdLst>
         </p14:section>
-        <p14:section name="S9 · Thực hành nhóm" id="{245cc48e-74e0-80eb-1361-267f0e419b94}">
+        <p14:section name="S9 · Thực hành nhóm" id="{35761c5c-2dde-a8d1-ab7b-05fd15ef49e4}">
           <p14:sldIdLst>
             <p14:sldId id="304"/>
             <p14:sldId id="305"/>
             <p14:sldId id="306"/>
           </p14:sldIdLst>
         </p14:section>
-        <p14:section name="S10 · Kết buổi" id="{d6b03280-dd21-adf9-1268-d40eb136c22a}">
+        <p14:section name="S10 · Kết buổi" id="{bad0f0e7-57e6-bbed-efbf-f407f59217cf}">
           <p14:sldIdLst>
             <p14:sldId id="307"/>
             <p14:sldId id="308"/>
@@ -8214,7 +8214,7 @@
                 <a:ea typeface="Alexandria" pitchFamily="34" charset="-122"/>
                 <a:cs typeface="Alexandria" pitchFamily="34" charset="-120"/>
               </a:rPr>
-              <a:t>Chuyên gia phản biện</a:t>
+              <a:t>Chuyên gia phản biện</a:t>
             </a:r>
             <a:endParaRPr lang="en-US" sz="2800" dirty="0"/>
           </a:p>
@@ -9344,7 +9344,7 @@
                           <a:ea typeface="Alexandria" pitchFamily="34" charset="-122"/>
                           <a:cs typeface="Alexandria" pitchFamily="34" charset="-120"/>
                         </a:rPr>
-                        <a:t>Bối cảnh, số liệu thị trường</a:t>
+                        <a:t>Bối cảnh, số liệu thị trường</a:t>
                       </a:r>
                       <a:endParaRPr lang="en-US" sz="2400" dirty="0">
                         <a:latin typeface="Alexandria" charset="0"/>
@@ -9417,7 +9417,7 @@
                           <a:ea typeface="Alexandria" pitchFamily="34" charset="-122"/>
                           <a:cs typeface="Alexandria" pitchFamily="34" charset="-120"/>
                         </a:rPr>
-                        <a:t>Không dùng làm nguồn</a:t>
+                        <a:t>Không dùng làm nguồn</a:t>
                       </a:r>
                       <a:endParaRPr lang="en-US" sz="2400" dirty="0">
                         <a:latin typeface="Alexandria" charset="0"/>
@@ -13588,7 +13588,7 @@
                 <a:ea typeface="Alexandria" pitchFamily="34" charset="-122"/>
                 <a:cs typeface="Alexandria" pitchFamily="34" charset="-120"/>
               </a:rPr>
-              <a:t>Danh mục tài liệu của bài: các bài cũ hơn</a:t>
+              <a:t>Danh mục tài liệu của bài: các bài cũ hơn</a:t>
             </a:r>
             <a:endParaRPr lang="en-US" sz="2600" dirty="0"/>
           </a:p>
@@ -13753,7 +13753,7 @@
                 <a:ea typeface="Alexandria" pitchFamily="34" charset="-122"/>
                 <a:cs typeface="Alexandria" pitchFamily="34" charset="-120"/>
               </a:rPr>
-              <a:t>“Được trích dẫn bởi”: các bài mới hơn</a:t>
+              <a:t>“Được trích dẫn bởi”: các bài mới hơn</a:t>
             </a:r>
             <a:endParaRPr lang="en-US" sz="2600" dirty="0"/>
           </a:p>
@@ -13918,7 +13918,7 @@
                 <a:ea typeface="Alexandria" pitchFamily="34" charset="-122"/>
                 <a:cs typeface="Alexandria" pitchFamily="34" charset="-120"/>
               </a:rPr>
-              <a:t>“Bài viết có liên quan”</a:t>
+              <a:t>“Bài viết có liên quan”</a:t>
             </a:r>
             <a:endParaRPr lang="en-US" sz="2600" dirty="0"/>
           </a:p>
@@ -15939,7 +15939,7 @@
                 <a:ea typeface="Alexandria" pitchFamily="34" charset="-122"/>
                 <a:cs typeface="Alexandria" pitchFamily="34" charset="-120"/>
               </a:rPr>
-              <a:t>"repurchase intention" "bubble tea" OR "milk tea"</a:t>
+              <a:t>"repurchase intention" "bubble tea" OR "milk tea"</a:t>
             </a:r>
             <a:endParaRPr lang="en-US" sz="2600" dirty="0"/>
           </a:p>
@@ -16570,7 +16570,7 @@
                 <a:ea typeface="Alexandria" pitchFamily="34" charset="-122"/>
                 <a:cs typeface="Alexandria" pitchFamily="34" charset="-120"/>
               </a:rPr>
-              <a:t>Vấn đề nghiên cứu</a:t>
+              <a:t>Vấn đề nghiên cứu</a:t>
             </a:r>
             <a:endParaRPr lang="en-US" sz="2800" dirty="0"/>
           </a:p>
@@ -18788,7 +18788,7 @@
                 <a:ea typeface="Alexandria" pitchFamily="34" charset="-122"/>
                 <a:cs typeface="Alexandria" pitchFamily="34" charset="-120"/>
               </a:rPr>
-              <a:t>Thêm ngoặc kép, intitle:, lọc năm</a:t>
+              <a:t>Thêm ngoặc kép, intitle:, lọc năm</a:t>
             </a:r>
             <a:endParaRPr lang="en-US" sz="2600" dirty="0"/>
           </a:p>
@@ -20838,7 +20838,7 @@
                           <a:ea typeface="Alexandria" pitchFamily="34" charset="-122"/>
                           <a:cs typeface="Alexandria" pitchFamily="34" charset="-120"/>
                         </a:rPr>
-                        <a:t>Phương pháp: dựa trên gì?</a:t>
+                        <a:t>Phương pháp: dựa trên gì?</a:t>
                       </a:r>
                       <a:endParaRPr lang="en-US" sz="2400" dirty="0">
                         <a:latin typeface="Alexandria" charset="0"/>
@@ -20980,7 +20980,7 @@
                           <a:ea typeface="Alexandria" pitchFamily="34" charset="-122"/>
                           <a:cs typeface="Alexandria" pitchFamily="34" charset="-120"/>
                         </a:rPr>
-                        <a:t>Không bằng chứng</a:t>
+                        <a:t>Không bằng chứng</a:t>
                       </a:r>
                       <a:endParaRPr lang="en-US" sz="2400" dirty="0">
                         <a:latin typeface="Alexandria" charset="0"/>
@@ -21807,7 +21807,7 @@
       </p:sp>
       <p:sp>
         <p:nvSpPr>
-          <p:cNvPr id="11" name="Thẻ Thiếu bằng chứng"/>
+          <p:cNvPr id="11" name="Thẻ Thiếu bằng chứng"/>
           <p:cNvSpPr/>
           <p:nvPr/>
         </p:nvSpPr>
@@ -21922,7 +21922,7 @@
                 <a:ea typeface="Alexandria" pitchFamily="34" charset="-122"/>
                 <a:cs typeface="Alexandria" pitchFamily="34" charset="-120"/>
               </a:rPr>
-              <a:t>Thiếu bằng chứng</a:t>
+              <a:t>Thiếu bằng chứng</a:t>
             </a:r>
             <a:endParaRPr lang="en-US" sz="2800" dirty="0"/>
           </a:p>
@@ -21972,7 +21972,7 @@
       </p:sp>
       <p:sp>
         <p:nvSpPr>
-          <p:cNvPr id="16" name="Thẻ Xung đột lợi ích"/>
+          <p:cNvPr id="16" name="Thẻ Xung đột lợi ích"/>
           <p:cNvSpPr/>
           <p:nvPr/>
         </p:nvSpPr>
@@ -22087,7 +22087,7 @@
                 <a:ea typeface="Alexandria" pitchFamily="34" charset="-122"/>
                 <a:cs typeface="Alexandria" pitchFamily="34" charset="-120"/>
               </a:rPr>
-              <a:t>Xung đột lợi ích</a:t>
+              <a:t>Xung đột lợi ích</a:t>
             </a:r>
             <a:endParaRPr lang="en-US" sz="2800" dirty="0"/>
           </a:p>
@@ -23393,7 +23393,7 @@
                 <a:ea typeface="Alexandria" pitchFamily="34" charset="-122"/>
                 <a:cs typeface="Alexandria" pitchFamily="34" charset="-120"/>
               </a:rPr>
-              <a:t>Làm nguồn học thuật</a:t>
+              <a:t>Làm nguồn học thuật</a:t>
             </a:r>
             <a:endParaRPr lang="en-US" sz="2600" dirty="0"/>
           </a:p>
@@ -23723,7 +23723,7 @@
                 <a:ea typeface="Alexandria" pitchFamily="34" charset="-122"/>
                 <a:cs typeface="Alexandria" pitchFamily="34" charset="-120"/>
               </a:rPr>
-              <a:t>Không dùng làm nguồn</a:t>
+              <a:t>Không dùng làm nguồn</a:t>
             </a:r>
             <a:endParaRPr lang="en-US" sz="2600" dirty="0"/>
           </a:p>
@@ -24151,7 +24151,7 @@
                 <a:ea typeface="Alexandria" pitchFamily="34" charset="-122"/>
                 <a:cs typeface="Alexandria" pitchFamily="34" charset="-120"/>
               </a:rPr>
-              <a:t>Một bài báo năm 2022 trên tạp chí khoa học có phản biện. Tác giả là giảng viên đại học. Bài khảo sát 350 sinh viên tại TP. Hồ Chí Minh, mô tả rõ cách chọn mẫu và thang đo.</a:t>
+              <a:t>Một bài báo năm 2022 trên tạp chí khoa học có phản biện. Tác giả là giảng viên đại học. Bài khảo sát 350 sinh viên tại TP. Hồ Chí Minh, mô tả rõ cách chọn mẫu và thang đo.</a:t>
             </a:r>
             <a:endParaRPr lang="en-US" sz="2800" dirty="0"/>
           </a:p>
@@ -28758,7 +28758,7 @@
                 <a:ea typeface="Alexandria" pitchFamily="34" charset="-122"/>
                 <a:cs typeface="Alexandria" pitchFamily="34" charset="-120"/>
               </a:rPr>
-              <a:t>Nguyên văn, không nguồn</a:t>
+              <a:t>Nguyên văn, không nguồn</a:t>
             </a:r>
             <a:endParaRPr lang="en-US" sz="2400" dirty="0"/>
           </a:p>
@@ -28923,7 +28923,7 @@
                 <a:ea typeface="Alexandria" pitchFamily="34" charset="-122"/>
                 <a:cs typeface="Alexandria" pitchFamily="34" charset="-120"/>
               </a:rPr>
-              <a:t>Viết lại, không ghi nguồn</a:t>
+              <a:t>Viết lại, không ghi nguồn</a:t>
             </a:r>
             <a:endParaRPr lang="en-US" sz="2400" dirty="0"/>
           </a:p>
@@ -29088,7 +29088,7 @@
                 <a:ea typeface="Alexandria" pitchFamily="34" charset="-122"/>
                 <a:cs typeface="Alexandria" pitchFamily="34" charset="-120"/>
               </a:rPr>
-              <a:t>Như thể đã đọc bản gốc</a:t>
+              <a:t>Như thể đã đọc bản gốc</a:t>
             </a:r>
             <a:endParaRPr lang="en-US" sz="2400" dirty="0"/>
           </a:p>
@@ -29583,7 +29583,7 @@
                 <a:ea typeface="Alexandria" pitchFamily="34" charset="-122"/>
                 <a:cs typeface="Alexandria" pitchFamily="34" charset="-120"/>
               </a:rPr>
-              <a:t>Dịch Anh–Việt, không nguồn</a:t>
+              <a:t>Dịch Anh–Việt, không nguồn</a:t>
             </a:r>
             <a:endParaRPr lang="en-US" sz="2400" dirty="0"/>
           </a:p>
@@ -32040,7 +32040,7 @@
                 <a:ea typeface="Alexandria" pitchFamily="34" charset="-122"/>
                 <a:cs typeface="Alexandria" pitchFamily="34" charset="-120"/>
               </a:rPr>
-              <a:t>Theo American Marketing Association (2017), vai trò cốt lõi của nghiên cứu marketing là cung cấp thông tin giúp nhà marketing hiểu khách hàng và thị trường, từ đó nhận diện cơ hội, đánh giá hành động và theo dõi kết quả.</a:t>
+              <a:t>Theo American Marketing Association (2017), vai trò cốt lõi của nghiên cứu marketing là cung cấp thông tin giúp nhà marketing hiểu khách hàng và thị trường, từ đó nhận diện cơ hội, đánh giá hành động và theo dõi kết quả.</a:t>
             </a:r>
             <a:endParaRPr lang="en-US" sz="2600" dirty="0"/>
           </a:p>
@@ -32524,7 +32524,7 @@
                 <a:ea typeface="Alexandria" pitchFamily="34" charset="-122"/>
                 <a:cs typeface="Alexandria" pitchFamily="34" charset="-120"/>
               </a:rPr>
-              <a:t> — mỗi ý ghi chép đều kèm tác giả, năm, trang</a:t>
+              <a:t> — mỗi ý ghi chép đều kèm tác giả, năm, trang</a:t>
             </a:r>
             <a:endParaRPr lang="en-US" sz="2700" dirty="0"/>
           </a:p>
@@ -37775,7 +37775,7 @@
                 <a:ea typeface="Alexandria" pitchFamily="34" charset="-122"/>
                 <a:cs typeface="Alexandria" pitchFamily="34" charset="-120"/>
               </a:rPr>
-              <a:t>Không chọn chỉ dựa vào tên bài</a:t>
+              <a:t>Không chọn chỉ dựa vào tên bài</a:t>
             </a:r>
             <a:endParaRPr lang="en-US" sz="2600" dirty="0"/>
           </a:p>
@@ -37940,7 +37940,7 @@
                 <a:ea typeface="Alexandria" pitchFamily="34" charset="-122"/>
                 <a:cs typeface="Alexandria" pitchFamily="34" charset="-120"/>
               </a:rPr>
-              <a:t>Phải tìm thấy trên Google Scholar hoặc mở được bằng DOI</a:t>
+              <a:t>Phải tìm thấy trên Google Scholar hoặc mở được bằng DOI</a:t>
             </a:r>
             <a:endParaRPr lang="en-US" sz="2600" dirty="0"/>
           </a:p>

--- a/mkt1107/output/MKT1107_W02_slides.pptx
+++ b/mkt1107/output/MKT1107_W02_slides.pptx
@@ -162,7 +162,7 @@
   <p:extLst>
     <p:ext uri="{521415D9-36F7-43E2-AB2F-B90AF26B5E84}">
       <p14:sectionLst xmlns:p14="http://schemas.microsoft.com/office/powerpoint/2010/main">
-        <p14:section name="Mở đầu" id="{e6ffc8bf-0962-e3c4-9ff6-0ab4bfaf20cc}">
+        <p14:section name="Mở đầu" id="{3bb45611-3693-3fce-64e7-5ef1236a6067}">
           <p14:sldIdLst>
             <p14:sldId id="256"/>
             <p14:sldId id="257"/>
@@ -170,7 +170,7 @@
             <p14:sldId id="259"/>
           </p14:sldIdLst>
         </p14:section>
-        <p14:section name="S2 · Vì sao trích dẫn; trích dẫn trong bài và trong danh mục" id="{59d14468-c3a3-d1d2-e35e-ba4dd254daee}">
+        <p14:section name="S2 · Vì sao trích dẫn; trích dẫn trong bài và trong danh mục" id="{50a56ccb-6207-2115-c9b2-6ec65b53801c}">
           <p14:sldIdLst>
             <p14:sldId id="260"/>
             <p14:sldId id="261"/>
@@ -180,7 +180,7 @@
             <p14:sldId id="265"/>
           </p14:sldIdLst>
         </p14:section>
-        <p14:section name="S3 · Tìm tài liệu học thuật" id="{0c02bdc2-5433-8500-5d98-68558317cf9f}">
+        <p14:section name="S3 · Tìm tài liệu học thuật" id="{b8f8d1f1-d231-9d9d-0b70-c6c950bd66ad}">
           <p14:sldIdLst>
             <p14:sldId id="266"/>
             <p14:sldId id="267"/>
@@ -193,7 +193,7 @@
             <p14:sldId id="274"/>
           </p14:sldIdLst>
         </p14:section>
-        <p14:section name="S4 · Kiểm tra nhanh: chuỗi tìm kiếm nào tốt hơn?" id="{fc8d5b87-247b-492d-475d-a84915345ce5}">
+        <p14:section name="S4 · Kiểm tra nhanh: chuỗi tìm kiếm nào tốt hơn?" id="{2d362153-e14c-363b-abe1-a642a0b12b4a}">
           <p14:sldIdLst>
             <p14:sldId id="275"/>
             <p14:sldId id="276"/>
@@ -202,7 +202,7 @@
             <p14:sldId id="279"/>
           </p14:sldIdLst>
         </p14:section>
-        <p14:section name="S5 · Đánh giá độ tin cậy của nguồn" id="{503c2b0d-3616-4385-86db-e602a4462cbf}">
+        <p14:section name="S5 · Đánh giá độ tin cậy của nguồn" id="{9d619f8c-a5b4-508d-fc62-a3829e35e7ed}">
           <p14:sldIdLst>
             <p14:sldId id="280"/>
             <p14:sldId id="281"/>
@@ -219,7 +219,7 @@
             <p14:sldId id="292"/>
           </p14:sldIdLst>
         </p14:section>
-        <p14:section name="S7 · Đạo văn và cách tránh" id="{b3407d22-1764-dd05-bd29-bb5d6652a639}">
+        <p14:section name="S7 · Đạo văn và cách tránh" id="{6ecc3b31-0e25-71d9-9ede-d3db515153b0}">
           <p14:sldIdLst>
             <p14:sldId id="293"/>
             <p14:sldId id="294"/>
@@ -230,7 +230,7 @@
             <p14:sldId id="299"/>
           </p14:sldIdLst>
         </p14:section>
-        <p14:section name="S8 · Tóm tắt và tổng hợp tài liệu" id="{9534bba6-6a15-1820-6e50-89da5fb6f7e8}">
+        <p14:section name="S8 · Tóm tắt và tổng hợp tài liệu" id="{0ff58926-2f44-4c68-5c46-37180c81afea}">
           <p14:sldIdLst>
             <p14:sldId id="300"/>
             <p14:sldId id="301"/>
@@ -238,14 +238,14 @@
             <p14:sldId id="303"/>
           </p14:sldIdLst>
         </p14:section>
-        <p14:section name="S9 · Thực hành nhóm" id="{35761c5c-2dde-a8d1-ab7b-05fd15ef49e4}">
+        <p14:section name="S9 · Thực hành nhóm" id="{2edb9f47-b6d3-c57f-742e-59dfda42d020}">
           <p14:sldIdLst>
             <p14:sldId id="304"/>
             <p14:sldId id="305"/>
             <p14:sldId id="306"/>
           </p14:sldIdLst>
         </p14:section>
-        <p14:section name="S10 · Kết buổi" id="{bad0f0e7-57e6-bbed-efbf-f407f59217cf}">
+        <p14:section name="S10 · Kết buổi" id="{0f4f533b-ab13-2e38-cf33-2eb6b95e17bd}">
           <p14:sldIdLst>
             <p14:sldId id="307"/>
             <p14:sldId id="308"/>
@@ -8747,9 +8747,9 @@
             <a:tbl>
               <a:tblPr/>
               <a:tblGrid>
-                <a:gridCol w="3073157"/>
-                <a:gridCol w="4302059"/>
-                <a:gridCol w="3689024"/>
+                <a:gridCol w="3110191"/>
+                <a:gridCol w="4282121"/>
+                <a:gridCol w="3671928"/>
               </a:tblGrid>
               <a:tr h="524256">
                 <a:tc>
@@ -11957,9 +11957,9 @@
             <a:tbl>
               <a:tblPr/>
               <a:tblGrid>
-                <a:gridCol w="2863949"/>
-                <a:gridCol w="2863949"/>
-                <a:gridCol w="5336342"/>
+                <a:gridCol w="2731349"/>
+                <a:gridCol w="2731349"/>
+                <a:gridCol w="5601542"/>
               </a:tblGrid>
               <a:tr h="524256">
                 <a:tc>
@@ -20168,9 +20168,9 @@
             <a:tbl>
               <a:tblPr/>
               <a:tblGrid>
-                <a:gridCol w="4239934"/>
-                <a:gridCol w="3739288"/>
-                <a:gridCol w="3085017"/>
+                <a:gridCol w="4162494"/>
+                <a:gridCol w="3574203"/>
+                <a:gridCol w="3327543"/>
               </a:tblGrid>
               <a:tr h="524256">
                 <a:tc>
@@ -20602,7 +20602,7 @@
                   </a:tcPr>
                 </a:tc>
               </a:tr>
-              <a:tr h="524256">
+              <a:tr h="920496">
                 <a:tc>
                   <a:txBody>
                     <a:bodyPr/>
@@ -39740,102 +39740,6 @@
       </p:sp>
       <p:sp>
         <p:nvSpPr>
-          <p:cNvPr id="10" name="Dấu đầu dòng"/>
-          <p:cNvSpPr/>
-          <p:nvPr/>
-        </p:nvSpPr>
-        <p:spPr>
-          <a:xfrm>
-            <a:off x="585216" y="4803648"/>
-            <a:ext cx="164592" cy="164592"/>
-          </a:xfrm>
-          <a:prstGeom prst="ellipse">
-            <a:avLst/>
-          </a:prstGeom>
-          <a:solidFill>
-            <a:srgbClr val="FF9259"/>
-          </a:solidFill>
-          <a:ln/>
-        </p:spPr>
-      </p:sp>
-      <p:sp>
-        <p:nvSpPr>
-          <p:cNvPr id="11" name="Text 9"/>
-          <p:cNvSpPr txBox="1"/>
-          <p:nvPr/>
-        </p:nvSpPr>
-        <p:spPr>
-          <a:xfrm>
-            <a:off x="914400" y="4611624"/>
-            <a:ext cx="10607040" cy="1341120"/>
-          </a:xfrm>
-          <a:prstGeom prst="rect">
-            <a:avLst/>
-          </a:prstGeom>
-          <a:noFill/>
-          <a:ln/>
-        </p:spPr>
-        <p:txBody>
-          <a:bodyPr wrap="square" lIns="76200" tIns="76200" rIns="76200" bIns="76200" rtlCol="0" anchor="t"/>
-          <a:lstStyle/>
-          <a:p>
-            <a:pPr algn="l" indent="0" marL="0">
-              <a:lnSpc>
-                <a:spcPts val="3100"/>
-              </a:lnSpc>
-              <a:buNone/>
-            </a:pPr>
-            <a:r>
-              <a:rPr lang="en-US" sz="2400" dirty="0">
-                <a:solidFill>
-                  <a:srgbClr val="2E2A3A"/>
-                </a:solidFill>
-                <a:latin typeface="Alexandria" pitchFamily="34" charset="0"/>
-                <a:ea typeface="Alexandria" pitchFamily="34" charset="-122"/>
-                <a:cs typeface="Alexandria" pitchFamily="34" charset="-120"/>
-              </a:rPr>
-              <a:t>American Psychological Association. (2020). </a:t>
-            </a:r>
-            <a:pPr algn="l" indent="0" marL="0">
-              <a:lnSpc>
-                <a:spcPts val="3100"/>
-              </a:lnSpc>
-              <a:buNone/>
-            </a:pPr>
-            <a:r>
-              <a:rPr lang="en-US" sz="2400" i="1" dirty="0">
-                <a:solidFill>
-                  <a:srgbClr val="2E2A3A"/>
-                </a:solidFill>
-                <a:latin typeface="Alexandria" pitchFamily="34" charset="0"/>
-                <a:ea typeface="Alexandria" pitchFamily="34" charset="-122"/>
-                <a:cs typeface="Alexandria" pitchFamily="34" charset="-120"/>
-              </a:rPr>
-              <a:t>Publication manual of the American Psychological Association</a:t>
-            </a:r>
-            <a:pPr algn="l" indent="0" marL="0">
-              <a:lnSpc>
-                <a:spcPts val="3100"/>
-              </a:lnSpc>
-              <a:buNone/>
-            </a:pPr>
-            <a:r>
-              <a:rPr lang="en-US" sz="2400" dirty="0">
-                <a:solidFill>
-                  <a:srgbClr val="2E2A3A"/>
-                </a:solidFill>
-                <a:latin typeface="Alexandria" pitchFamily="34" charset="0"/>
-                <a:ea typeface="Alexandria" pitchFamily="34" charset="-122"/>
-                <a:cs typeface="Alexandria" pitchFamily="34" charset="-120"/>
-              </a:rPr>
-              <a:t> (7th ed.). https://doi.org/10.1037/0000165-000</a:t>
-            </a:r>
-            <a:endParaRPr lang="en-US" sz="2400" dirty="0"/>
-          </a:p>
-        </p:txBody>
-      </p:sp>
-      <p:sp>
-        <p:nvSpPr>
           <p:cNvPr id="25" name="Slide Number Placeholder 0"/>
           <p:cNvSpPr>
             <a:spLocks noGrp="1"/>
@@ -40037,6 +39941,102 @@
         <p:spPr>
           <a:xfrm>
             <a:off x="914400" y="1783080"/>
+            <a:ext cx="10607040" cy="1341120"/>
+          </a:xfrm>
+          <a:prstGeom prst="rect">
+            <a:avLst/>
+          </a:prstGeom>
+          <a:noFill/>
+          <a:ln/>
+        </p:spPr>
+        <p:txBody>
+          <a:bodyPr wrap="square" lIns="76200" tIns="76200" rIns="76200" bIns="76200" rtlCol="0" anchor="t"/>
+          <a:lstStyle/>
+          <a:p>
+            <a:pPr algn="l" indent="0" marL="0">
+              <a:lnSpc>
+                <a:spcPts val="3100"/>
+              </a:lnSpc>
+              <a:buNone/>
+            </a:pPr>
+            <a:r>
+              <a:rPr lang="en-US" sz="2400" dirty="0">
+                <a:solidFill>
+                  <a:srgbClr val="2E2A3A"/>
+                </a:solidFill>
+                <a:latin typeface="Alexandria" pitchFamily="34" charset="0"/>
+                <a:ea typeface="Alexandria" pitchFamily="34" charset="-122"/>
+                <a:cs typeface="Alexandria" pitchFamily="34" charset="-120"/>
+              </a:rPr>
+              <a:t>American Psychological Association. (2020). </a:t>
+            </a:r>
+            <a:pPr algn="l" indent="0" marL="0">
+              <a:lnSpc>
+                <a:spcPts val="3100"/>
+              </a:lnSpc>
+              <a:buNone/>
+            </a:pPr>
+            <a:r>
+              <a:rPr lang="en-US" sz="2400" i="1" dirty="0">
+                <a:solidFill>
+                  <a:srgbClr val="2E2A3A"/>
+                </a:solidFill>
+                <a:latin typeface="Alexandria" pitchFamily="34" charset="0"/>
+                <a:ea typeface="Alexandria" pitchFamily="34" charset="-122"/>
+                <a:cs typeface="Alexandria" pitchFamily="34" charset="-120"/>
+              </a:rPr>
+              <a:t>Publication manual of the American Psychological Association</a:t>
+            </a:r>
+            <a:pPr algn="l" indent="0" marL="0">
+              <a:lnSpc>
+                <a:spcPts val="3100"/>
+              </a:lnSpc>
+              <a:buNone/>
+            </a:pPr>
+            <a:r>
+              <a:rPr lang="en-US" sz="2400" dirty="0">
+                <a:solidFill>
+                  <a:srgbClr val="2E2A3A"/>
+                </a:solidFill>
+                <a:latin typeface="Alexandria" pitchFamily="34" charset="0"/>
+                <a:ea typeface="Alexandria" pitchFamily="34" charset="-122"/>
+                <a:cs typeface="Alexandria" pitchFamily="34" charset="-120"/>
+              </a:rPr>
+              <a:t> (7th ed.). https://doi.org/10.1037/0000165-000</a:t>
+            </a:r>
+            <a:endParaRPr lang="en-US" sz="2400" dirty="0"/>
+          </a:p>
+        </p:txBody>
+      </p:sp>
+      <p:sp>
+        <p:nvSpPr>
+          <p:cNvPr id="8" name="Dấu đầu dòng"/>
+          <p:cNvSpPr/>
+          <p:nvPr/>
+        </p:nvSpPr>
+        <p:spPr>
+          <a:xfrm>
+            <a:off x="585216" y="3389376"/>
+            <a:ext cx="164592" cy="164592"/>
+          </a:xfrm>
+          <a:prstGeom prst="ellipse">
+            <a:avLst/>
+          </a:prstGeom>
+          <a:solidFill>
+            <a:srgbClr val="FF9259"/>
+          </a:solidFill>
+          <a:ln/>
+        </p:spPr>
+      </p:sp>
+      <p:sp>
+        <p:nvSpPr>
+          <p:cNvPr id="9" name="Text 7"/>
+          <p:cNvSpPr txBox="1"/>
+          <p:nvPr/>
+        </p:nvSpPr>
+        <p:spPr>
+          <a:xfrm>
+            <a:off x="914400" y="3197352"/>
             <a:ext cx="10607040" cy="944880"/>
           </a:xfrm>
           <a:prstGeom prst="rect">

--- a/mkt1107/output/MKT1107_W02_slides.pptx
+++ b/mkt1107/output/MKT1107_W02_slides.pptx
@@ -162,7 +162,7 @@
   <p:extLst>
     <p:ext uri="{521415D9-36F7-43E2-AB2F-B90AF26B5E84}">
       <p14:sectionLst xmlns:p14="http://schemas.microsoft.com/office/powerpoint/2010/main">
-        <p14:section name="Mở đầu" id="{3bb45611-3693-3fce-64e7-5ef1236a6067}">
+        <p14:section name="Mở đầu" id="{72109e02-0ee8-fc80-2697-fe79d603bc25}">
           <p14:sldIdLst>
             <p14:sldId id="256"/>
             <p14:sldId id="257"/>
@@ -170,7 +170,7 @@
             <p14:sldId id="259"/>
           </p14:sldIdLst>
         </p14:section>
-        <p14:section name="S2 · Vì sao trích dẫn; trích dẫn trong bài và trong danh mục" id="{50a56ccb-6207-2115-c9b2-6ec65b53801c}">
+        <p14:section name="S2 · Vì sao trích dẫn; trích dẫn trong bài và trong danh mục" id="{22a4fe8c-3a7e-cdba-1683-8771c9570870}">
           <p14:sldIdLst>
             <p14:sldId id="260"/>
             <p14:sldId id="261"/>
@@ -180,7 +180,7 @@
             <p14:sldId id="265"/>
           </p14:sldIdLst>
         </p14:section>
-        <p14:section name="S3 · Tìm tài liệu học thuật" id="{b8f8d1f1-d231-9d9d-0b70-c6c950bd66ad}">
+        <p14:section name="S3 · Tìm tài liệu học thuật" id="{90327afd-9a10-214e-607d-1ee667e8edc1}">
           <p14:sldIdLst>
             <p14:sldId id="266"/>
             <p14:sldId id="267"/>
@@ -193,7 +193,7 @@
             <p14:sldId id="274"/>
           </p14:sldIdLst>
         </p14:section>
-        <p14:section name="S4 · Kiểm tra nhanh: chuỗi tìm kiếm nào tốt hơn?" id="{2d362153-e14c-363b-abe1-a642a0b12b4a}">
+        <p14:section name="S4 · Kiểm tra nhanh: chuỗi tìm kiếm nào tốt hơn?" id="{82ee6ebd-db3b-8fc5-1722-871462999340}">
           <p14:sldIdLst>
             <p14:sldId id="275"/>
             <p14:sldId id="276"/>
@@ -202,7 +202,7 @@
             <p14:sldId id="279"/>
           </p14:sldIdLst>
         </p14:section>
-        <p14:section name="S5 · Đánh giá độ tin cậy của nguồn" id="{9d619f8c-a5b4-508d-fc62-a3829e35e7ed}">
+        <p14:section name="S5 · Đánh giá độ tin cậy của nguồn" id="{48e65fe6-3784-686d-2897-24614e1ff7f8}">
           <p14:sldIdLst>
             <p14:sldId id="280"/>
             <p14:sldId id="281"/>
@@ -219,7 +219,7 @@
             <p14:sldId id="292"/>
           </p14:sldIdLst>
         </p14:section>
-        <p14:section name="S7 · Đạo văn và cách tránh" id="{6ecc3b31-0e25-71d9-9ede-d3db515153b0}">
+        <p14:section name="S7 · Đạo văn và cách tránh" id="{6fcd7d62-3a6f-1119-ff5d-a318f5688281}">
           <p14:sldIdLst>
             <p14:sldId id="293"/>
             <p14:sldId id="294"/>
@@ -230,7 +230,7 @@
             <p14:sldId id="299"/>
           </p14:sldIdLst>
         </p14:section>
-        <p14:section name="S8 · Tóm tắt và tổng hợp tài liệu" id="{0ff58926-2f44-4c68-5c46-37180c81afea}">
+        <p14:section name="S8 · Tóm tắt và tổng hợp tài liệu" id="{39a15d1d-5858-fdd7-e010-9844d25f653b}">
           <p14:sldIdLst>
             <p14:sldId id="300"/>
             <p14:sldId id="301"/>
@@ -238,14 +238,14 @@
             <p14:sldId id="303"/>
           </p14:sldIdLst>
         </p14:section>
-        <p14:section name="S9 · Thực hành nhóm" id="{2edb9f47-b6d3-c57f-742e-59dfda42d020}">
+        <p14:section name="S9 · Thực hành nhóm" id="{ce761100-5359-c3dc-9295-32494fef89ed}">
           <p14:sldIdLst>
             <p14:sldId id="304"/>
             <p14:sldId id="305"/>
             <p14:sldId id="306"/>
           </p14:sldIdLst>
         </p14:section>
-        <p14:section name="S10 · Kết buổi" id="{0f4f533b-ab13-2e38-cf33-2eb6b95e17bd}">
+        <p14:section name="S10 · Kết buổi" id="{6a50e0f0-d446-78be-17b4-94c42c14f2c8}">
           <p14:sldIdLst>
             <p14:sldId id="307"/>
             <p14:sldId id="308"/>
@@ -841,7 +841,8 @@
           <a:p>
             <a:r>
               <a:rPr lang="en-US" dirty="0"/>
-              <a:t>Phân đoạn S3, khoảng 22 phút (phút 20–42): nguồn học thuật và không học thuật (khoảng 6 phút); tìm ở đâu (khoảng 4 phút); từ khóa Việt – Anh (khoảng 4 phút); toán tử tìm kiếm (khoảng 3 phút); mở rộng từ một bài tốt và ghi lại ngay (khoảng 2 phút); demo trực tiếp trên Google Scholar (khoảng 6 phút).
+              <a:t>Thời gian: phút 20–42 của buổi học.
+Phân đoạn S3, khoảng 22 phút (phút 20–42): nguồn học thuật và không học thuật (khoảng 6 phút); tìm ở đâu (khoảng 4 phút); từ khóa Việt – Anh (khoảng 4 phút); toán tử tìm kiếm (khoảng 3 phút); mở rộng từ một bài tốt và ghi lại ngay (khoảng 2 phút); demo trực tiếp trên Google Scholar (khoảng 6 phút).
 Trước khi vào phần này, mở sẵn Google Scholar trên máy chiếu và chuẩn bị ảnh chụp màn hình dự phòng phòng khi Google Scholar hiện captcha do nhiều máy cùng truy cập.
 Nhắc sinh viên mở máy tính để thử chuỗi tìm kiếm cùng lúc với demo.</a:t>
             </a:r>
@@ -1756,7 +1757,8 @@
           <a:p>
             <a:r>
               <a:rPr lang="en-US" dirty="0"/>
-              <a:t>Phân đoạn S4, 6 phút (phút 42–48): ba câu hỏi nhanh về từ khóa, mỗi câu có hai phương án A và B.
+              <a:t>Thời gian: phút 42–48 của buổi học.
+Phân đoạn S4, 6 phút (phút 42–48): ba câu hỏi nhanh về từ khóa, mỗi câu có hai phương án A và B.
 Cách làm: chiếu lần lượt từng câu; cặp bàn bàn 20 giây; giảng viên đếm 3–2–1, cả lớp giơ 1 ngón cho A hoặc 2 ngón cho B cùng lúc; giảng viên nói đáp án và giải thích trong một câu.
 Không chấm điểm; ai không muốn giơ tay có thể ghi đáp án ra giấy. Mục đích là kiểm tra lớp đã nắm cách tách khái niệm, tìm hai thứ tiếng và dùng toán tử trước khi vào thực hành.</a:t>
             </a:r>
@@ -1846,7 +1848,8 @@
           <a:p>
             <a:r>
               <a:rPr lang="en-US" dirty="0"/>
-              <a:t>Đọc câu 1: đề tài là ý định mua lại trà sữa của sinh viên. A là trà sữa sinh viên; B là "repurchase intention" "bubble tea" OR "milk tea".
+              <a:t>Thời gian: 20 giây bàn với bạn.
+Đọc câu 1: đề tài là ý định mua lại trà sữa của sinh viên. A là trà sữa sinh viên; B là "repurchase intention" "bubble tea" OR "milk tea".
 Cặp bàn 20 giây, đếm 3–2–1, cả lớp giơ 1 ngón (A) hoặc 2 ngón (B).
 Đáp án: B — tách khái niệm, dùng thuật ngữ học thuật tiếng Anh, cụm từ chính xác trong ngoặc kép, và OR cho hai cách gọi của cùng một sản phẩm.
 Nếu nhiều bạn chọn A, hỏi lại: “Chuỗi A tìm khái niệm hành vi nào?” → không có; đây chính là lỗi gõ cả câu đề tài vào ô tìm kiếm.
@@ -1938,7 +1941,8 @@
           <a:p>
             <a:r>
               <a:rPr lang="en-US" dirty="0"/>
-              <a:t>Đọc câu 2: nhóm muốn có cả nghiên cứu ở Việt Nam và nghiên cứu quốc tế. A: chỉ tìm bằng tiếng Việt. B: tìm cả tiếng Việt và tiếng Anh.
+              <a:t>Thời gian: 20 giây bàn với bạn.
+Đọc câu 2: nhóm muốn có cả nghiên cứu ở Việt Nam và nghiên cứu quốc tế. A: chỉ tìm bằng tiếng Việt. B: tìm cả tiếng Việt và tiếng Anh.
 Cặp bàn 20 giây, đếm 3–2–1, giơ tay.
 Đáp án: B — phần lớn tài liệu học thuật về marketing viết bằng tiếng Anh; tài liệu tiếng Việt cho bối cảnh trong nước. Hai nguồn bổ sung cho nhau: quốc tế cho lý thuyết, mô hình, thang đo; trong nước cho bối cảnh và kết quả ở thị trường Việt Nam.
 Câu này thường gần như cả lớp đúng — đi nhanh, chuyển sang câu 3.</a:t>
@@ -2029,7 +2033,8 @@
           <a:p>
             <a:r>
               <a:rPr lang="en-US" dirty="0"/>
-              <a:t>Đọc câu 3: kết quả quá nhiều (hàng chục nghìn), phần lớn không liên quan. A: thêm ngoặc kép, intitle:, lọc năm. B: đổi sang từ khóa chung hơn.
+              <a:t>Thời gian: 20 giây bàn với bạn.
+Đọc câu 3: kết quả quá nhiều (hàng chục nghìn), phần lớn không liên quan. A: thêm ngoặc kép, intitle:, lọc năm. B: đổi sang từ khóa chung hơn.
 Cặp bàn 20 giây, đếm 3–2–1, giơ tay.
 Đáp án: A — thu hẹp. Ngược lại, khi có quá ít kết quả thì mới nới sang từ chung hơn, ví dụ từ “trà sữa” sang “đồ uống”.
 Kết phần kiểm tra: nhắc ba ý — tách khái niệm, tìm hai thứ tiếng, dùng toán tử để thu hẹp hoặc nới rộng. Chuyển sang giải lao, báo trước nội dung sau giải lao: làm sao biết một nguồn có đáng tin không.</a:t>
@@ -2120,7 +2125,8 @@
           <a:p>
             <a:r>
               <a:rPr lang="en-US" dirty="0"/>
-              <a:t>Giải lao 15 phút (phút 48–63). Điền giờ quay lại lên slide hoặc nói to trước khi lớp ra ngoài.
+              <a:t>Thời gian: giải lao 15 phút.
+Giải lao 15 phút (phút 48–63). Điền giờ quay lại lên slide hoặc nói to trước khi lớp ra ngoài.
 Báo trước: “Sau giải lao: làm sao biết một nguồn có đáng tin không.”
 Trong giờ giải lao: kiểm tra mạng và truy cập Google Scholar cho phần thực hành 45 phút cuối buổi; nếu nhiều máy cùng truy cập dễ bị captcha, chuẩn bị phương án cho các nhóm dùng thêm thư viện số hoặc trang của tạp chí trong nước.
 Lưu ý cho giảng viên: giờ quay lại trên slide đang để “…” — điền trước buổi học.</a:t>
@@ -2211,7 +2217,8 @@
           <a:p>
             <a:r>
               <a:rPr lang="en-US" dirty="0"/>
-              <a:t>Phân đoạn S5, khoảng 12 phút (phút 63–75): bốn tiêu chí đánh giá nguồn (tác giả, ấn phẩm, phương pháp, tính cập nhật) cộng câu hỏi “viết để làm gì?”; ba dấu hiệu thiên lệch; một tình huống nghiên cứu do bên hưởng lợi tài trợ (giả định).
+              <a:t>Thời gian: phút 63–75 của buổi học.
+Phân đoạn S5, khoảng 12 phút (phút 63–75): bốn tiêu chí đánh giá nguồn (tác giả, ấn phẩm, phương pháp, tính cập nhật) cộng câu hỏi “viết để làm gì?”; ba dấu hiệu thiên lệch; một tình huống nghiên cứu do bên hưởng lợi tài trợ (giả định).
 Chào lớp trở lại, kiểm tra nhanh mọi người đã vào chỗ.
 Nối lại tình huống đầu buổi: câu “8/10 sinh viên…” trên fanpage — phần này cho các bạn công cụ để giải thích vì sao không dám trích câu đó.</a:t>
             </a:r>
@@ -2762,7 +2769,8 @@
           <a:p>
             <a:r>
               <a:rPr lang="en-US" dirty="0"/>
-              <a:t>Hoạt động S6 “Soi nguồn” (phút 75–83), làm theo cặp, không nộp, không chấm điểm.
+              <a:t>Thời gian: 30 giây bàn với bạn.
+Hoạt động S6 “Soi nguồn” (phút 75–83), làm theo cặp, không nộp, không chấm điểm.
 Kịch bản mở đầu: “Mình vừa có bốn tiêu chí: tác giả, ấn phẩm, phương pháp, tính cập nhật — cộng thêm câu hỏi ‘viết để làm gì’. Bây giờ thử soi sáu nguồn. Mỗi nguồn, các bạn có 30 giây bàn với bạn bên cạnh, rồi khi tôi đếm 3–2–1 thì giơ tay: 1 ngón là dùng được, 2 ngón là dùng có điều kiện, 3 ngón là không dùng. Cả lớp giơ cùng lúc.”
 Mỗi nguồn khoảng 50 giây: đọc → 30 giây thảo luận → 3–2–1 giơ tay → nói đáp án và tiêu chí quyết định trong một câu. Cả 6 nguồn là mô tả giả định.
 Nếu ít bạn giơ tay: nhắc “sai không sao — đây là luyện tập”, giảng viên giơ tay làm mẫu. Ai không muốn giơ tay có thể ghi ra giấy.
@@ -3497,7 +3505,8 @@
           <a:p>
             <a:r>
               <a:rPr lang="en-US" dirty="0"/>
-              <a:t>Phân đoạn S7, khoảng 10 phút (phút 83–93): định nghĩa và năm dạng đạo văn (khoảng 4 phút); demo ba phiên bản diễn đạt lại một định nghĩa (khoảng 4 phút); cách tránh và chuyện dùng AI (khoảng 2 phút).
+              <a:t>Thời gian: phút 83–93 của buổi học.
+Phân đoạn S7, khoảng 10 phút (phút 83–93): định nghĩa và năm dạng đạo văn (khoảng 4 phút); demo ba phiên bản diễn đạt lại một định nghĩa (khoảng 4 phút); cách tránh và chuyện dùng AI (khoảng 2 phút).
 Chuyển ý từ phần trước: các bạn đã biết tìm nguồn và đánh giá nguồn — bây giờ là cách dùng nguồn cho đúng, để không vô tình biến ý của người khác thành của mình.
 Lưu ý cho giảng viên: nếu muốn nêu quy định liêm chính học thuật của trường hoặc của khoa, chuẩn bị trước nội dung quy định đó.</a:t>
             </a:r>
@@ -4224,7 +4233,8 @@
           <a:p>
             <a:r>
               <a:rPr lang="en-US" dirty="0"/>
-              <a:t>Phân đoạn S8, khoảng 7 phút (phút 93–100): giới thiệu tổng quan tài liệu là gì, nằm ở đâu trong tiểu luận; phân biệt tóm tắt và tổng hợp; bảng tóm tắt 5 cột làm ví dụ với Ajzen (1991).
+              <a:t>Thời gian: phút 93–100 của buổi học.
+Phân đoạn S8, khoảng 7 phút (phút 93–100): giới thiệu tổng quan tài liệu là gì, nằm ở đâu trong tiểu luận; phân biệt tóm tắt và tổng hợp; bảng tóm tắt 5 cột làm ví dụ với Ajzen (1991).
 Nói rõ với lớp: hôm nay chỉ giới thiệu — tuần sau các bạn sẽ viết đoạn tổng quan đầu tiên ngay trên lớp. Phần này chuẩn bị trực tiếp cho chặng 4 của thực hành (bắt đầu bảng tóm tắt) và cho M2 (một trang tổng quan).
 Giữ nhịp nhanh để phần thực hành có đủ 45 phút.</a:t>
             </a:r>
@@ -4589,7 +4599,8 @@
           <a:p>
             <a:r>
               <a:rPr lang="en-US" dirty="0"/>
-              <a:t>Phân đoạn S9 — thực hành nhóm 45 phút (phút 100–145), hoạt động Săn tài liệu cho đề tài. Các nhóm làm việc theo nhóm dự án 2–3 bạn đã lập ở Buổi 1, với đề tài M1 của mình.
+              <a:t>Thời gian: phút 100–145 của buổi học.
+Phân đoạn S9 — thực hành nhóm 45 phút (phút 100–145), hoạt động Săn tài liệu cho đề tài. Các nhóm làm việc theo nhóm dự án 2–3 bạn đã lập ở Buổi 1, với đề tài M1 của mình.
 Nhắc các nhóm mở máy tính có mạng, mở đề tài M1 và phiếu nhóm (có thể chép phiếu vào một file chung của nhóm).
 Lưu ý cho giảng viên: kịch bản, năm chặng, phiếu nhóm và cách phản hồi nằm trong phiếu hoạt động Săn tài liệu. Giảng viên đi từng nhóm suốt 45 phút.</a:t>
             </a:r>
@@ -4679,7 +4690,8 @@
           <a:p>
             <a:r>
               <a:rPr lang="en-US" dirty="0"/>
-              <a:t>Phân đoạn S2, khoảng 12 phút (phút 8–20): nguyên tắc ghi nguồn, bốn lý do phải trích dẫn, các chuẩn trích dẫn (học phần dùng APA 7), khái niệm trích dẫn trong bài và danh mục tài liệu tham khảo, quy tắc khớp 1–1, và cách trích tác giả Việt.
+              <a:t>Thời gian: phút 8–20 của buổi học.
+Phân đoạn S2, khoảng 12 phút (phút 8–20): nguyên tắc ghi nguồn, bốn lý do phải trích dẫn, các chuẩn trích dẫn (học phần dùng APA 7), khái niệm trích dẫn trong bài và danh mục tài liệu tham khảo, quy tắc khớp 1–1, và cách trích tác giả Việt.
 Giữ đúng phạm vi: chỉ giới thiệu khái niệm; không giảng cấu trúc từng thành phần của một mục danh mục — phần đó để Buổi 3, khi các nhóm mang danh mục của mình đến sửa trên lớp.
 Chuẩn bị sẵn bảng để viết câu nguyên tắc ở slide tiếp theo và giữ suốt buổi.</a:t>
             </a:r>
@@ -4769,7 +4781,9 @@
           <a:p>
             <a:r>
               <a:rPr lang="en-US" dirty="0"/>
-              <a:t>Để slide này trên màn hình suốt 45 phút.
+              <a:t>Thời gian: 45 phút.
+Phân bổ thời gian — chặng 1: 8 phút; chặng 2: 15 phút; chặng 3: 10 phút; chặng 4: 8 phút; chặng 5: 4 phút; (chặng 5 gốc: “2 nhóm chia sẻ, mỗi nhóm 1 phút”).
+Để slide này trên màn hình suốt 45 phút.
 Chặng 1: viết lại vấn đề nghiên cứu trong một câu, tách thành 2–3 khái niệm, mỗi khái niệm có từ khóa tiếng Việt và tiếng Anh, viết 2 chuỗi tìm kiếm có ít nhất một toán tử. Chặng 2: tìm trên Google Scholar 5 tài liệu liên quan nhất, ít nhất 3 là nguồn học thuật; mở từng tài liệu ra xem; ghi ngay tác giả, năm, tên bài, nơi công bố, DOI. Chặng 3: mỗi tài liệu học thuật hay không, đánh giá 4 tiêu chí (Đạt / Chưa đạt / Chưa rõ), xem dấu hiệu thiên lệch, kết luận giữ, giữ có điều kiện hay loại. Chặng 4: chọn ít nhất 2 tài liệu học thuật, đọc abstract, phương pháp, kết luận, điền bảng 5 cột bằng lời của nhóm. Chặng 5: 2 nhóm nói 1 phút về một tài liệu tốt nhất hoặc một nguồn đã loại.
 Sản phẩm: phiếu nhóm với 5 tài liệu và bảng tóm tắt — làm tiếp ở nhà thành danh mục 8 tài liệu, rồi thành M2.
 Câu hỏi thảo luận chung: từ khóa nào cho kết quả tốt nhất? Không có bài đúng sản phẩm thì mở rộng sang đâu?</a:t>
@@ -4951,7 +4965,8 @@
           <a:p>
             <a:r>
               <a:rPr lang="en-US" dirty="0"/>
-              <a:t>Phân đoạn S10 — kết buổi, 5 phút (phút 145–150).
+              <a:t>Thời gian: phút 145–150 của buổi học.
+Phân đoạn S10 — kết buổi, 5 phút (phút 145–150).
 Yêu cầu các nhóm dừng làm và lưu phiếu nhóm (5 tài liệu, đánh giá, bảng tóm tắt) để làm tiếp bài tập về nhà.
 Phát phiếu ra về (giấy nhỏ). Phần này không được cắt kể cả khi thực hành kéo dài — phiếu ra về cho giảng viên biết lớp đã nắm được các tiêu chí đánh giá nguồn hay chưa, và quyết định có cần nhắc lại ở đầu Buổi 3 không.</a:t>
             </a:r>
@@ -5816,8 +5831,8 @@
         </p:nvSpPr>
         <p:spPr>
           <a:xfrm>
-            <a:off x="3840480" y="2103120"/>
-            <a:ext cx="6766560" cy="2194560"/>
+            <a:off x="3840480" y="2240280"/>
+            <a:ext cx="6766560" cy="2377440"/>
           </a:xfrm>
           <a:prstGeom prst="rect">
             <a:avLst/>
@@ -7629,49 +7644,7 @@
       </p:sp>
       <p:sp>
         <p:nvSpPr>
-          <p:cNvPr id="8" name="Text 6"/>
-          <p:cNvSpPr txBox="1"/>
-          <p:nvPr/>
-        </p:nvSpPr>
-        <p:spPr>
-          <a:xfrm>
-            <a:off x="3840480" y="1417320"/>
-            <a:ext cx="6766560" cy="594360"/>
-          </a:xfrm>
-          <a:prstGeom prst="rect">
-            <a:avLst/>
-          </a:prstGeom>
-          <a:noFill/>
-          <a:ln/>
-        </p:spPr>
-        <p:txBody>
-          <a:bodyPr wrap="square" lIns="76200" tIns="76200" rIns="76200" bIns="76200" rtlCol="0" anchor="t"/>
-          <a:lstStyle/>
-          <a:p>
-            <a:pPr algn="l" indent="0" marL="0">
-              <a:lnSpc>
-                <a:spcPts val="3600"/>
-              </a:lnSpc>
-              <a:buNone/>
-            </a:pPr>
-            <a:r>
-              <a:rPr lang="en-US" sz="2800" b="1" dirty="0">
-                <a:solidFill>
-                  <a:srgbClr val="962B7C"/>
-                </a:solidFill>
-                <a:latin typeface="Alexandria" pitchFamily="34" charset="0"/>
-                <a:ea typeface="Alexandria" pitchFamily="34" charset="-122"/>
-                <a:cs typeface="Alexandria" pitchFamily="34" charset="-120"/>
-              </a:rPr>
-              <a:t>20–42 phút</a:t>
-            </a:r>
-            <a:endParaRPr lang="en-US" sz="2800" dirty="0"/>
-          </a:p>
-        </p:txBody>
-      </p:sp>
-      <p:sp>
-        <p:nvSpPr>
-          <p:cNvPr id="9" name="Text 0"/>
+          <p:cNvPr id="8" name="Text 0"/>
           <p:cNvSpPr/>
           <p:nvPr>
             <p:ph idx="100" type="title" hasCustomPrompt="1"/>
@@ -7679,8 +7652,8 @@
         </p:nvSpPr>
         <p:spPr>
           <a:xfrm>
-            <a:off x="3840480" y="2103120"/>
-            <a:ext cx="6766560" cy="2194560"/>
+            <a:off x="3840480" y="2240280"/>
+            <a:ext cx="6766560" cy="2377440"/>
           </a:xfrm>
           <a:prstGeom prst="rect">
             <a:avLst/>
@@ -7689,7 +7662,7 @@
           <a:ln/>
         </p:spPr>
         <p:txBody>
-          <a:bodyPr wrap="square" lIns="76200" tIns="76200" rIns="76200" bIns="76200" rtlCol="0" anchor="t"/>
+          <a:bodyPr wrap="square" lIns="76200" tIns="76200" rIns="76200" bIns="76200" rtlCol="0" anchor="ctr"/>
           <a:lstStyle/>
           <a:p>
             <a:pPr algn="l" indent="0" marL="0">
@@ -17120,49 +17093,7 @@
       </p:sp>
       <p:sp>
         <p:nvSpPr>
-          <p:cNvPr id="8" name="Text 6"/>
-          <p:cNvSpPr txBox="1"/>
-          <p:nvPr/>
-        </p:nvSpPr>
-        <p:spPr>
-          <a:xfrm>
-            <a:off x="3840480" y="1417320"/>
-            <a:ext cx="6766560" cy="594360"/>
-          </a:xfrm>
-          <a:prstGeom prst="rect">
-            <a:avLst/>
-          </a:prstGeom>
-          <a:noFill/>
-          <a:ln/>
-        </p:spPr>
-        <p:txBody>
-          <a:bodyPr wrap="square" lIns="76200" tIns="76200" rIns="76200" bIns="76200" rtlCol="0" anchor="t"/>
-          <a:lstStyle/>
-          <a:p>
-            <a:pPr algn="l" indent="0" marL="0">
-              <a:lnSpc>
-                <a:spcPts val="3600"/>
-              </a:lnSpc>
-              <a:buNone/>
-            </a:pPr>
-            <a:r>
-              <a:rPr lang="en-US" sz="2800" b="1" dirty="0">
-                <a:solidFill>
-                  <a:srgbClr val="962B7C"/>
-                </a:solidFill>
-                <a:latin typeface="Alexandria" pitchFamily="34" charset="0"/>
-                <a:ea typeface="Alexandria" pitchFamily="34" charset="-122"/>
-                <a:cs typeface="Alexandria" pitchFamily="34" charset="-120"/>
-              </a:rPr>
-              <a:t>42–48 phút</a:t>
-            </a:r>
-            <a:endParaRPr lang="en-US" sz="2800" dirty="0"/>
-          </a:p>
-        </p:txBody>
-      </p:sp>
-      <p:sp>
-        <p:nvSpPr>
-          <p:cNvPr id="9" name="Text 0"/>
+          <p:cNvPr id="8" name="Text 0"/>
           <p:cNvSpPr/>
           <p:nvPr>
             <p:ph idx="100" type="title" hasCustomPrompt="1"/>
@@ -17170,8 +17101,8 @@
         </p:nvSpPr>
         <p:spPr>
           <a:xfrm>
-            <a:off x="3840480" y="2103120"/>
-            <a:ext cx="6766560" cy="2194560"/>
+            <a:off x="3840480" y="2240280"/>
+            <a:ext cx="6766560" cy="2377440"/>
           </a:xfrm>
           <a:prstGeom prst="rect">
             <a:avLst/>
@@ -17180,7 +17111,7 @@
           <a:ln/>
         </p:spPr>
         <p:txBody>
-          <a:bodyPr wrap="square" lIns="76200" tIns="76200" rIns="76200" bIns="76200" rtlCol="0" anchor="t"/>
+          <a:bodyPr wrap="square" lIns="76200" tIns="76200" rIns="76200" bIns="76200" rtlCol="0" anchor="ctr"/>
           <a:lstStyle/>
           <a:p>
             <a:pPr algn="l" indent="0" marL="0">
@@ -17822,7 +17753,7 @@
                 <a:ea typeface="Alexandria" pitchFamily="34" charset="-122"/>
                 <a:cs typeface="Alexandria" pitchFamily="34" charset="-120"/>
               </a:rPr>
-              <a:t>20 giây bàn với bạn, đếm 3–2–1, giơ tay.</a:t>
+              <a:t>Bàn với bạn, đếm 3–2–1, giơ tay.</a:t>
             </a:r>
             <a:endParaRPr lang="en-US" sz="2600" dirty="0"/>
           </a:p>
@@ -18449,7 +18380,7 @@
                 <a:ea typeface="Alexandria" pitchFamily="34" charset="-122"/>
                 <a:cs typeface="Alexandria" pitchFamily="34" charset="-120"/>
               </a:rPr>
-              <a:t>20 giây bàn với bạn, đếm 3–2–1, giơ tay.</a:t>
+              <a:t>Bàn với bạn, đếm 3–2–1, giơ tay.</a:t>
             </a:r>
             <a:endParaRPr lang="en-US" sz="2600" dirty="0"/>
           </a:p>
@@ -19076,7 +19007,7 @@
                 <a:ea typeface="Alexandria" pitchFamily="34" charset="-122"/>
                 <a:cs typeface="Alexandria" pitchFamily="34" charset="-120"/>
               </a:rPr>
-              <a:t>20 giây bàn với bạn, đếm 3–2–1, giơ tay.</a:t>
+              <a:t>Bàn với bạn, đếm 3–2–1, giơ tay.</a:t>
             </a:r>
             <a:endParaRPr lang="en-US" sz="2600" dirty="0"/>
           </a:p>
@@ -19288,7 +19219,7 @@
                 <a:ea typeface="Alexandria" pitchFamily="34" charset="-122"/>
                 <a:cs typeface="Alexandria" pitchFamily="34" charset="-120"/>
               </a:rPr>
-              <a:t>15'</a:t>
+              <a:t>Nghỉ</a:t>
             </a:r>
             <a:endParaRPr lang="en-US" sz="9600" dirty="0"/>
           </a:p>
@@ -19330,7 +19261,7 @@
                 <a:ea typeface="Alexandria" pitchFamily="34" charset="-122"/>
                 <a:cs typeface="Alexandria" pitchFamily="34" charset="-120"/>
               </a:rPr>
-              <a:t>Giải lao 15 phút</a:t>
+              <a:t>Giải lao</a:t>
             </a:r>
             <a:endParaRPr lang="en-US" sz="4800" dirty="0"/>
           </a:p>
@@ -19592,49 +19523,7 @@
       </p:sp>
       <p:sp>
         <p:nvSpPr>
-          <p:cNvPr id="8" name="Text 6"/>
-          <p:cNvSpPr txBox="1"/>
-          <p:nvPr/>
-        </p:nvSpPr>
-        <p:spPr>
-          <a:xfrm>
-            <a:off x="3840480" y="1417320"/>
-            <a:ext cx="6766560" cy="594360"/>
-          </a:xfrm>
-          <a:prstGeom prst="rect">
-            <a:avLst/>
-          </a:prstGeom>
-          <a:noFill/>
-          <a:ln/>
-        </p:spPr>
-        <p:txBody>
-          <a:bodyPr wrap="square" lIns="76200" tIns="76200" rIns="76200" bIns="76200" rtlCol="0" anchor="t"/>
-          <a:lstStyle/>
-          <a:p>
-            <a:pPr algn="l" indent="0" marL="0">
-              <a:lnSpc>
-                <a:spcPts val="3600"/>
-              </a:lnSpc>
-              <a:buNone/>
-            </a:pPr>
-            <a:r>
-              <a:rPr lang="en-US" sz="2800" b="1" dirty="0">
-                <a:solidFill>
-                  <a:srgbClr val="962B7C"/>
-                </a:solidFill>
-                <a:latin typeface="Alexandria" pitchFamily="34" charset="0"/>
-                <a:ea typeface="Alexandria" pitchFamily="34" charset="-122"/>
-                <a:cs typeface="Alexandria" pitchFamily="34" charset="-120"/>
-              </a:rPr>
-              <a:t>63–75 phút</a:t>
-            </a:r>
-            <a:endParaRPr lang="en-US" sz="2800" dirty="0"/>
-          </a:p>
-        </p:txBody>
-      </p:sp>
-      <p:sp>
-        <p:nvSpPr>
-          <p:cNvPr id="9" name="Text 0"/>
+          <p:cNvPr id="8" name="Text 0"/>
           <p:cNvSpPr/>
           <p:nvPr>
             <p:ph idx="100" type="title" hasCustomPrompt="1"/>
@@ -19642,8 +19531,8 @@
         </p:nvSpPr>
         <p:spPr>
           <a:xfrm>
-            <a:off x="3840480" y="2103120"/>
-            <a:ext cx="6766560" cy="2194560"/>
+            <a:off x="3840480" y="2240280"/>
+            <a:ext cx="6766560" cy="2377440"/>
           </a:xfrm>
           <a:prstGeom prst="rect">
             <a:avLst/>
@@ -19652,7 +19541,7 @@
           <a:ln/>
         </p:spPr>
         <p:txBody>
-          <a:bodyPr wrap="square" lIns="76200" tIns="76200" rIns="76200" bIns="76200" rtlCol="0" anchor="t"/>
+          <a:bodyPr wrap="square" lIns="76200" tIns="76200" rIns="76200" bIns="76200" rtlCol="0" anchor="ctr"/>
           <a:lstStyle/>
           <a:p>
             <a:pPr algn="l" indent="0" marL="0">
@@ -23846,7 +23735,7 @@
                 <a:ea typeface="Alexandria" pitchFamily="34" charset="-122"/>
                 <a:cs typeface="Alexandria" pitchFamily="34" charset="-120"/>
               </a:rPr>
-              <a:t>30 giây bàn, đếm 3–2–1, cả lớp giơ cùng lúc.</a:t>
+              <a:t>Bàn với bạn, đếm 3–2–1, cả lớp giơ cùng lúc.</a:t>
             </a:r>
             <a:endParaRPr lang="en-US" sz="2600" dirty="0"/>
           </a:p>
@@ -28344,49 +28233,7 @@
       </p:sp>
       <p:sp>
         <p:nvSpPr>
-          <p:cNvPr id="8" name="Text 6"/>
-          <p:cNvSpPr txBox="1"/>
-          <p:nvPr/>
-        </p:nvSpPr>
-        <p:spPr>
-          <a:xfrm>
-            <a:off x="3840480" y="1417320"/>
-            <a:ext cx="6766560" cy="594360"/>
-          </a:xfrm>
-          <a:prstGeom prst="rect">
-            <a:avLst/>
-          </a:prstGeom>
-          <a:noFill/>
-          <a:ln/>
-        </p:spPr>
-        <p:txBody>
-          <a:bodyPr wrap="square" lIns="76200" tIns="76200" rIns="76200" bIns="76200" rtlCol="0" anchor="t"/>
-          <a:lstStyle/>
-          <a:p>
-            <a:pPr algn="l" indent="0" marL="0">
-              <a:lnSpc>
-                <a:spcPts val="3600"/>
-              </a:lnSpc>
-              <a:buNone/>
-            </a:pPr>
-            <a:r>
-              <a:rPr lang="en-US" sz="2800" b="1" dirty="0">
-                <a:solidFill>
-                  <a:srgbClr val="962B7C"/>
-                </a:solidFill>
-                <a:latin typeface="Alexandria" pitchFamily="34" charset="0"/>
-                <a:ea typeface="Alexandria" pitchFamily="34" charset="-122"/>
-                <a:cs typeface="Alexandria" pitchFamily="34" charset="-120"/>
-              </a:rPr>
-              <a:t>83–93 phút</a:t>
-            </a:r>
-            <a:endParaRPr lang="en-US" sz="2800" dirty="0"/>
-          </a:p>
-        </p:txBody>
-      </p:sp>
-      <p:sp>
-        <p:nvSpPr>
-          <p:cNvPr id="9" name="Text 0"/>
+          <p:cNvPr id="8" name="Text 0"/>
           <p:cNvSpPr/>
           <p:nvPr>
             <p:ph idx="100" type="title" hasCustomPrompt="1"/>
@@ -28394,8 +28241,8 @@
         </p:nvSpPr>
         <p:spPr>
           <a:xfrm>
-            <a:off x="3840480" y="2103120"/>
-            <a:ext cx="6766560" cy="2194560"/>
+            <a:off x="3840480" y="2240280"/>
+            <a:ext cx="6766560" cy="2377440"/>
           </a:xfrm>
           <a:prstGeom prst="rect">
             <a:avLst/>
@@ -28404,7 +28251,7 @@
           <a:ln/>
         </p:spPr>
         <p:txBody>
-          <a:bodyPr wrap="square" lIns="76200" tIns="76200" rIns="76200" bIns="76200" rtlCol="0" anchor="t"/>
+          <a:bodyPr wrap="square" lIns="76200" tIns="76200" rIns="76200" bIns="76200" rtlCol="0" anchor="ctr"/>
           <a:lstStyle/>
           <a:p>
             <a:pPr algn="l" indent="0" marL="0">
@@ -33221,49 +33068,7 @@
       </p:sp>
       <p:sp>
         <p:nvSpPr>
-          <p:cNvPr id="8" name="Text 6"/>
-          <p:cNvSpPr txBox="1"/>
-          <p:nvPr/>
-        </p:nvSpPr>
-        <p:spPr>
-          <a:xfrm>
-            <a:off x="3840480" y="1417320"/>
-            <a:ext cx="6766560" cy="594360"/>
-          </a:xfrm>
-          <a:prstGeom prst="rect">
-            <a:avLst/>
-          </a:prstGeom>
-          <a:noFill/>
-          <a:ln/>
-        </p:spPr>
-        <p:txBody>
-          <a:bodyPr wrap="square" lIns="76200" tIns="76200" rIns="76200" bIns="76200" rtlCol="0" anchor="t"/>
-          <a:lstStyle/>
-          <a:p>
-            <a:pPr algn="l" indent="0" marL="0">
-              <a:lnSpc>
-                <a:spcPts val="3600"/>
-              </a:lnSpc>
-              <a:buNone/>
-            </a:pPr>
-            <a:r>
-              <a:rPr lang="en-US" sz="2800" b="1" dirty="0">
-                <a:solidFill>
-                  <a:srgbClr val="962B7C"/>
-                </a:solidFill>
-                <a:latin typeface="Alexandria" pitchFamily="34" charset="0"/>
-                <a:ea typeface="Alexandria" pitchFamily="34" charset="-122"/>
-                <a:cs typeface="Alexandria" pitchFamily="34" charset="-120"/>
-              </a:rPr>
-              <a:t>93–100 phút</a:t>
-            </a:r>
-            <a:endParaRPr lang="en-US" sz="2800" dirty="0"/>
-          </a:p>
-        </p:txBody>
-      </p:sp>
-      <p:sp>
-        <p:nvSpPr>
-          <p:cNvPr id="9" name="Text 0"/>
+          <p:cNvPr id="8" name="Text 0"/>
           <p:cNvSpPr/>
           <p:nvPr>
             <p:ph idx="100" type="title" hasCustomPrompt="1"/>
@@ -33271,8 +33076,8 @@
         </p:nvSpPr>
         <p:spPr>
           <a:xfrm>
-            <a:off x="3840480" y="2103120"/>
-            <a:ext cx="6766560" cy="2194560"/>
+            <a:off x="3840480" y="2240280"/>
+            <a:ext cx="6766560" cy="2377440"/>
           </a:xfrm>
           <a:prstGeom prst="rect">
             <a:avLst/>
@@ -33281,7 +33086,7 @@
           <a:ln/>
         </p:spPr>
         <p:txBody>
-          <a:bodyPr wrap="square" lIns="76200" tIns="76200" rIns="76200" bIns="76200" rtlCol="0" anchor="t"/>
+          <a:bodyPr wrap="square" lIns="76200" tIns="76200" rIns="76200" bIns="76200" rtlCol="0" anchor="ctr"/>
           <a:lstStyle/>
           <a:p>
             <a:pPr algn="l" indent="0" marL="0">
@@ -36252,49 +36057,7 @@
       </p:sp>
       <p:sp>
         <p:nvSpPr>
-          <p:cNvPr id="8" name="Text 6"/>
-          <p:cNvSpPr txBox="1"/>
-          <p:nvPr/>
-        </p:nvSpPr>
-        <p:spPr>
-          <a:xfrm>
-            <a:off x="3840480" y="1417320"/>
-            <a:ext cx="6766560" cy="594360"/>
-          </a:xfrm>
-          <a:prstGeom prst="rect">
-            <a:avLst/>
-          </a:prstGeom>
-          <a:noFill/>
-          <a:ln/>
-        </p:spPr>
-        <p:txBody>
-          <a:bodyPr wrap="square" lIns="76200" tIns="76200" rIns="76200" bIns="76200" rtlCol="0" anchor="t"/>
-          <a:lstStyle/>
-          <a:p>
-            <a:pPr algn="l" indent="0" marL="0">
-              <a:lnSpc>
-                <a:spcPts val="3600"/>
-              </a:lnSpc>
-              <a:buNone/>
-            </a:pPr>
-            <a:r>
-              <a:rPr lang="en-US" sz="2800" b="1" dirty="0">
-                <a:solidFill>
-                  <a:srgbClr val="962B7C"/>
-                </a:solidFill>
-                <a:latin typeface="Alexandria" pitchFamily="34" charset="0"/>
-                <a:ea typeface="Alexandria" pitchFamily="34" charset="-122"/>
-                <a:cs typeface="Alexandria" pitchFamily="34" charset="-120"/>
-              </a:rPr>
-              <a:t>100–145 phút</a:t>
-            </a:r>
-            <a:endParaRPr lang="en-US" sz="2800" dirty="0"/>
-          </a:p>
-        </p:txBody>
-      </p:sp>
-      <p:sp>
-        <p:nvSpPr>
-          <p:cNvPr id="9" name="Text 0"/>
+          <p:cNvPr id="8" name="Text 0"/>
           <p:cNvSpPr/>
           <p:nvPr>
             <p:ph idx="100" type="title" hasCustomPrompt="1"/>
@@ -36302,8 +36065,8 @@
         </p:nvSpPr>
         <p:spPr>
           <a:xfrm>
-            <a:off x="3840480" y="2103120"/>
-            <a:ext cx="6766560" cy="2194560"/>
+            <a:off x="3840480" y="2240280"/>
+            <a:ext cx="6766560" cy="2377440"/>
           </a:xfrm>
           <a:prstGeom prst="rect">
             <a:avLst/>
@@ -36312,7 +36075,7 @@
           <a:ln/>
         </p:spPr>
         <p:txBody>
-          <a:bodyPr wrap="square" lIns="76200" tIns="76200" rIns="76200" bIns="76200" rtlCol="0" anchor="t"/>
+          <a:bodyPr wrap="square" lIns="76200" tIns="76200" rIns="76200" bIns="76200" rtlCol="0" anchor="ctr"/>
           <a:lstStyle/>
           <a:p>
             <a:pPr algn="l" indent="0" marL="0">
@@ -36547,49 +36310,7 @@
       </p:sp>
       <p:sp>
         <p:nvSpPr>
-          <p:cNvPr id="8" name="Text 6"/>
-          <p:cNvSpPr txBox="1"/>
-          <p:nvPr/>
-        </p:nvSpPr>
-        <p:spPr>
-          <a:xfrm>
-            <a:off x="3840480" y="1417320"/>
-            <a:ext cx="6766560" cy="594360"/>
-          </a:xfrm>
-          <a:prstGeom prst="rect">
-            <a:avLst/>
-          </a:prstGeom>
-          <a:noFill/>
-          <a:ln/>
-        </p:spPr>
-        <p:txBody>
-          <a:bodyPr wrap="square" lIns="76200" tIns="76200" rIns="76200" bIns="76200" rtlCol="0" anchor="t"/>
-          <a:lstStyle/>
-          <a:p>
-            <a:pPr algn="l" indent="0" marL="0">
-              <a:lnSpc>
-                <a:spcPts val="3600"/>
-              </a:lnSpc>
-              <a:buNone/>
-            </a:pPr>
-            <a:r>
-              <a:rPr lang="en-US" sz="2800" b="1" dirty="0">
-                <a:solidFill>
-                  <a:srgbClr val="962B7C"/>
-                </a:solidFill>
-                <a:latin typeface="Alexandria" pitchFamily="34" charset="0"/>
-                <a:ea typeface="Alexandria" pitchFamily="34" charset="-122"/>
-                <a:cs typeface="Alexandria" pitchFamily="34" charset="-120"/>
-              </a:rPr>
-              <a:t>8–20 phút</a:t>
-            </a:r>
-            <a:endParaRPr lang="en-US" sz="2800" dirty="0"/>
-          </a:p>
-        </p:txBody>
-      </p:sp>
-      <p:sp>
-        <p:nvSpPr>
-          <p:cNvPr id="9" name="Text 0"/>
+          <p:cNvPr id="8" name="Text 0"/>
           <p:cNvSpPr/>
           <p:nvPr>
             <p:ph idx="100" type="title" hasCustomPrompt="1"/>
@@ -36597,8 +36318,8 @@
         </p:nvSpPr>
         <p:spPr>
           <a:xfrm>
-            <a:off x="3840480" y="2103120"/>
-            <a:ext cx="6766560" cy="2194560"/>
+            <a:off x="3840480" y="2240280"/>
+            <a:ext cx="6766560" cy="2377440"/>
           </a:xfrm>
           <a:prstGeom prst="rect">
             <a:avLst/>
@@ -36607,7 +36328,7 @@
           <a:ln/>
         </p:spPr>
         <p:txBody>
-          <a:bodyPr wrap="square" lIns="76200" tIns="76200" rIns="76200" bIns="76200" rtlCol="0" anchor="t"/>
+          <a:bodyPr wrap="square" lIns="76200" tIns="76200" rIns="76200" bIns="76200" rtlCol="0" anchor="ctr"/>
           <a:lstStyle/>
           <a:p>
             <a:pPr algn="l" indent="0" marL="0">
@@ -36796,7 +36517,7 @@
                 <a:ea typeface="Alexandria" pitchFamily="34" charset="-122"/>
                 <a:cs typeface="Alexandria" pitchFamily="34" charset="-120"/>
               </a:rPr>
-              <a:t>Săn tài liệu (45'): 5 tài liệu đầu tiên cho đề tài của nhóm</a:t>
+              <a:t>Săn tài liệu: 5 tài liệu đầu tiên cho đề tài của nhóm</a:t>
             </a:r>
             <a:endParaRPr lang="en-US" sz="3400" dirty="0"/>
           </a:p>
@@ -36833,7 +36554,7 @@
         <p:spPr>
           <a:xfrm>
             <a:off x="640080" y="1828800"/>
-            <a:ext cx="1280160" cy="548640"/>
+            <a:ext cx="731520" cy="548640"/>
           </a:xfrm>
           <a:prstGeom prst="roundRect">
             <a:avLst>
@@ -36855,7 +36576,7 @@
         <p:spPr>
           <a:xfrm>
             <a:off x="640080" y="1828800"/>
-            <a:ext cx="1280160" cy="548640"/>
+            <a:ext cx="731520" cy="548640"/>
           </a:xfrm>
           <a:prstGeom prst="rect">
             <a:avLst/>
@@ -36882,7 +36603,7 @@
                 <a:ea typeface="Alexandria" pitchFamily="34" charset="-122"/>
                 <a:cs typeface="Alexandria" pitchFamily="34" charset="-120"/>
               </a:rPr>
-              <a:t>8'</a:t>
+              <a:t>1</a:t>
             </a:r>
             <a:endParaRPr lang="en-US" sz="2400" dirty="0"/>
           </a:p>
@@ -36896,8 +36617,8 @@
         </p:nvSpPr>
         <p:spPr>
           <a:xfrm>
-            <a:off x="2103120" y="1783080"/>
-            <a:ext cx="9372600" cy="640080"/>
+            <a:off x="1554480" y="1783080"/>
+            <a:ext cx="9921240" cy="640080"/>
           </a:xfrm>
           <a:prstGeom prst="rect">
             <a:avLst/>
@@ -36961,7 +36682,7 @@
         <p:spPr>
           <a:xfrm>
             <a:off x="640080" y="2606040"/>
-            <a:ext cx="1280160" cy="548640"/>
+            <a:ext cx="731520" cy="548640"/>
           </a:xfrm>
           <a:prstGeom prst="roundRect">
             <a:avLst>
@@ -36983,7 +36704,7 @@
         <p:spPr>
           <a:xfrm>
             <a:off x="640080" y="2606040"/>
-            <a:ext cx="1280160" cy="548640"/>
+            <a:ext cx="731520" cy="548640"/>
           </a:xfrm>
           <a:prstGeom prst="rect">
             <a:avLst/>
@@ -37010,7 +36731,7 @@
                 <a:ea typeface="Alexandria" pitchFamily="34" charset="-122"/>
                 <a:cs typeface="Alexandria" pitchFamily="34" charset="-120"/>
               </a:rPr>
-              <a:t>15'</a:t>
+              <a:t>2</a:t>
             </a:r>
             <a:endParaRPr lang="en-US" sz="2400" dirty="0"/>
           </a:p>
@@ -37024,8 +36745,8 @@
         </p:nvSpPr>
         <p:spPr>
           <a:xfrm>
-            <a:off x="2103120" y="2560320"/>
-            <a:ext cx="9372600" cy="640080"/>
+            <a:off x="1554480" y="2560320"/>
+            <a:ext cx="9921240" cy="640080"/>
           </a:xfrm>
           <a:prstGeom prst="rect">
             <a:avLst/>
@@ -37089,7 +36810,7 @@
         <p:spPr>
           <a:xfrm>
             <a:off x="640080" y="3383280"/>
-            <a:ext cx="1280160" cy="548640"/>
+            <a:ext cx="731520" cy="548640"/>
           </a:xfrm>
           <a:prstGeom prst="roundRect">
             <a:avLst>
@@ -37111,7 +36832,7 @@
         <p:spPr>
           <a:xfrm>
             <a:off x="640080" y="3383280"/>
-            <a:ext cx="1280160" cy="548640"/>
+            <a:ext cx="731520" cy="548640"/>
           </a:xfrm>
           <a:prstGeom prst="rect">
             <a:avLst/>
@@ -37138,7 +36859,7 @@
                 <a:ea typeface="Alexandria" pitchFamily="34" charset="-122"/>
                 <a:cs typeface="Alexandria" pitchFamily="34" charset="-120"/>
               </a:rPr>
-              <a:t>10'</a:t>
+              <a:t>3</a:t>
             </a:r>
             <a:endParaRPr lang="en-US" sz="2400" dirty="0"/>
           </a:p>
@@ -37152,8 +36873,8 @@
         </p:nvSpPr>
         <p:spPr>
           <a:xfrm>
-            <a:off x="2103120" y="3337560"/>
-            <a:ext cx="9372600" cy="640080"/>
+            <a:off x="1554480" y="3337560"/>
+            <a:ext cx="9921240" cy="640080"/>
           </a:xfrm>
           <a:prstGeom prst="rect">
             <a:avLst/>
@@ -37217,7 +36938,7 @@
         <p:spPr>
           <a:xfrm>
             <a:off x="640080" y="4160520"/>
-            <a:ext cx="1280160" cy="548640"/>
+            <a:ext cx="731520" cy="548640"/>
           </a:xfrm>
           <a:prstGeom prst="roundRect">
             <a:avLst>
@@ -37239,7 +36960,7 @@
         <p:spPr>
           <a:xfrm>
             <a:off x="640080" y="4160520"/>
-            <a:ext cx="1280160" cy="548640"/>
+            <a:ext cx="731520" cy="548640"/>
           </a:xfrm>
           <a:prstGeom prst="rect">
             <a:avLst/>
@@ -37266,7 +36987,7 @@
                 <a:ea typeface="Alexandria" pitchFamily="34" charset="-122"/>
                 <a:cs typeface="Alexandria" pitchFamily="34" charset="-120"/>
               </a:rPr>
-              <a:t>8'</a:t>
+              <a:t>4</a:t>
             </a:r>
             <a:endParaRPr lang="en-US" sz="2400" dirty="0"/>
           </a:p>
@@ -37280,8 +37001,8 @@
         </p:nvSpPr>
         <p:spPr>
           <a:xfrm>
-            <a:off x="2103120" y="4114800"/>
-            <a:ext cx="9372600" cy="640080"/>
+            <a:off x="1554480" y="4114800"/>
+            <a:ext cx="9921240" cy="640080"/>
           </a:xfrm>
           <a:prstGeom prst="rect">
             <a:avLst/>
@@ -37345,7 +37066,7 @@
         <p:spPr>
           <a:xfrm>
             <a:off x="640080" y="4937760"/>
-            <a:ext cx="1280160" cy="548640"/>
+            <a:ext cx="731520" cy="548640"/>
           </a:xfrm>
           <a:prstGeom prst="roundRect">
             <a:avLst>
@@ -37367,7 +37088,7 @@
         <p:spPr>
           <a:xfrm>
             <a:off x="640080" y="4937760"/>
-            <a:ext cx="1280160" cy="548640"/>
+            <a:ext cx="731520" cy="548640"/>
           </a:xfrm>
           <a:prstGeom prst="rect">
             <a:avLst/>
@@ -37394,7 +37115,7 @@
                 <a:ea typeface="Alexandria" pitchFamily="34" charset="-122"/>
                 <a:cs typeface="Alexandria" pitchFamily="34" charset="-120"/>
               </a:rPr>
-              <a:t>4'</a:t>
+              <a:t>5</a:t>
             </a:r>
             <a:endParaRPr lang="en-US" sz="2400" dirty="0"/>
           </a:p>
@@ -37408,8 +37129,8 @@
         </p:nvSpPr>
         <p:spPr>
           <a:xfrm>
-            <a:off x="2103120" y="4892040"/>
-            <a:ext cx="9372600" cy="640080"/>
+            <a:off x="1554480" y="4892040"/>
+            <a:ext cx="9921240" cy="640080"/>
           </a:xfrm>
           <a:prstGeom prst="rect">
             <a:avLst/>
@@ -37436,7 +37157,7 @@
                 <a:ea typeface="Alexandria" pitchFamily="34" charset="-122"/>
                 <a:cs typeface="Alexandria" pitchFamily="34" charset="-120"/>
               </a:rPr>
-              <a:t>2 nhóm chia sẻ, mỗi nhóm 1 phút</a:t>
+              <a:t>2 nhóm chia sẻ</a:t>
             </a:r>
             <a:endParaRPr lang="en-US" sz="2800" dirty="0"/>
           </a:p>
@@ -38283,49 +38004,7 @@
       </p:sp>
       <p:sp>
         <p:nvSpPr>
-          <p:cNvPr id="8" name="Text 6"/>
-          <p:cNvSpPr txBox="1"/>
-          <p:nvPr/>
-        </p:nvSpPr>
-        <p:spPr>
-          <a:xfrm>
-            <a:off x="3840480" y="1417320"/>
-            <a:ext cx="6766560" cy="594360"/>
-          </a:xfrm>
-          <a:prstGeom prst="rect">
-            <a:avLst/>
-          </a:prstGeom>
-          <a:noFill/>
-          <a:ln/>
-        </p:spPr>
-        <p:txBody>
-          <a:bodyPr wrap="square" lIns="76200" tIns="76200" rIns="76200" bIns="76200" rtlCol="0" anchor="t"/>
-          <a:lstStyle/>
-          <a:p>
-            <a:pPr algn="l" indent="0" marL="0">
-              <a:lnSpc>
-                <a:spcPts val="3600"/>
-              </a:lnSpc>
-              <a:buNone/>
-            </a:pPr>
-            <a:r>
-              <a:rPr lang="en-US" sz="2800" b="1" dirty="0">
-                <a:solidFill>
-                  <a:srgbClr val="962B7C"/>
-                </a:solidFill>
-                <a:latin typeface="Alexandria" pitchFamily="34" charset="0"/>
-                <a:ea typeface="Alexandria" pitchFamily="34" charset="-122"/>
-                <a:cs typeface="Alexandria" pitchFamily="34" charset="-120"/>
-              </a:rPr>
-              <a:t>145–150 phút</a:t>
-            </a:r>
-            <a:endParaRPr lang="en-US" sz="2800" dirty="0"/>
-          </a:p>
-        </p:txBody>
-      </p:sp>
-      <p:sp>
-        <p:nvSpPr>
-          <p:cNvPr id="9" name="Text 0"/>
+          <p:cNvPr id="8" name="Text 0"/>
           <p:cNvSpPr/>
           <p:nvPr>
             <p:ph idx="100" type="title" hasCustomPrompt="1"/>
@@ -38333,8 +38012,8 @@
         </p:nvSpPr>
         <p:spPr>
           <a:xfrm>
-            <a:off x="3840480" y="2103120"/>
-            <a:ext cx="6766560" cy="2194560"/>
+            <a:off x="3840480" y="2240280"/>
+            <a:ext cx="6766560" cy="2377440"/>
           </a:xfrm>
           <a:prstGeom prst="rect">
             <a:avLst/>
@@ -38343,7 +38022,7 @@
           <a:ln/>
         </p:spPr>
         <p:txBody>
-          <a:bodyPr wrap="square" lIns="76200" tIns="76200" rIns="76200" bIns="76200" rtlCol="0" anchor="t"/>
+          <a:bodyPr wrap="square" lIns="76200" tIns="76200" rIns="76200" bIns="76200" rtlCol="0" anchor="ctr"/>
           <a:lstStyle/>
           <a:p>
             <a:pPr algn="l" indent="0" marL="0">
